--- a/projects/WaferEngine-staging/meetings/2026-08-24.pptx
+++ b/projects/WaferEngine-staging/meetings/2026-08-24.pptx
@@ -15,6 +15,7 @@
     <p:sldId id="260" r:id="rId11"/>
     <p:sldId id="261" r:id="rId12"/>
     <p:sldId id="262" r:id="rId13"/>
+    <p:sldId id="263" r:id="rId14"/>
   </p:sldIdLst>
   <p:sldSz cx="18288000" cy="10287000"/>
   <p:notesSz cx="10287000" cy="18288000"/>
@@ -506,7 +507,7 @@
           <a:lstStyle/>
           <a:p>
             <a:r>
-              <a:t>The recurring dichotomy, now measured four independent ways: anything the CE touches per word costs ~13-75 cycles; anything router-level costs ~1-2. This is the design rule for every future on-chip transfer mechanism. Remaining as-built headroom: the storage-side park receive (43.3) and emit (13.0) are still CE-per-word; DSD-ifying them (the next Exp-B-style rung) is projected to cut the tier's marginal ~4-5x. The wire itself is 39x under-used as built.</a:t>
+              <a:t>v4 wins every measured R&gt;=2 cell, so this page intentionally removes v3/v5. Model form: C_v4 = C_floor + (E-4)N*C_owner + W_fwd*C_router, W_fwd=(N-N/R)E. C_floor prices launch/control and role setup. C_owner prices the ordinary endpoint path per payload word: 96.00 task / 65.08 owner-DSD. C_router is the incremental multi-row forwarding tax: 1.06 / 1.29 cycles per forwarded word. The topology crop is derived from docs/diagrams/m3-multirow-v4-vs-v5.excalidraw; it shows the sequential GO epoch and router transit row.</a:t>
             </a:r>
           </a:p>
         </p:txBody>
@@ -520,6 +521,52 @@
 </file>
 
 <file path=ppt/notesSlides/notesSlide7.xml><?xml version="1.0" encoding="utf-8"?>
+<p:notes xmlns:a="http://schemas.openxmlformats.org/drawingml/2006/main" xmlns:p="http://schemas.openxmlformats.org/presentationml/2006/main" xmlns:r="http://schemas.openxmlformats.org/officeDocument/2006/relationships">
+  <p:cSld>
+    <p:spTree>
+      <p:nvGrpSpPr>
+        <p:cNvPr id="1" name=""/>
+        <p:cNvGrpSpPr/>
+        <p:nvPr/>
+      </p:nvGrpSpPr>
+      <p:grpSpPr>
+        <a:xfrm>
+          <a:off x="0" y="0"/>
+          <a:ext cx="0" cy="0"/>
+          <a:chOff x="0" y="0"/>
+          <a:chExt cx="0" cy="0"/>
+        </a:xfrm>
+      </p:grpSpPr>
+      <p:sp>
+        <p:nvSpPr>
+          <p:cNvPr id="2" name="Notes Placeholder"/>
+          <p:cNvSpPr>
+            <a:spLocks noGrp="1"/>
+          </p:cNvSpPr>
+          <p:nvPr>
+            <p:ph type="body" idx="1"/>
+          </p:nvPr>
+        </p:nvSpPr>
+        <p:spPr/>
+        <p:txBody>
+          <a:bodyPr/>
+          <a:lstStyle/>
+          <a:p>
+            <a:r>
+              <a:t>Two measured router-only terms: distance adds t_hop=2.0 cycles per transit hop per direction, so the full-cycle increment is 2(D-1)t_hop; v4 multi-row forwarding adds 1.06/1.29 cycles per forwarded word. CE coefficients are much larger: emit loop 13.0, reload relay about 28.8, park receive 43.3, receive+validate+forward 75.4 cycles/word. The comparison is mechanism-level: t_hop has units cycles/hop and is not plotted beside cycles/word. Pipeline stages combine by the binding maximum, not an unconditional sum. The demo blocks compute at the round boundary, so live concurrent-CE interference remains unmeasured.</a:t>
+            </a:r>
+          </a:p>
+        </p:txBody>
+      </p:sp>
+    </p:spTree>
+  </p:cSld>
+  <p:clrMapOvr>
+    <a:masterClrMapping/>
+  </p:clrMapOvr>
+</p:notes>
+</file>
+
+<file path=ppt/notesSlides/notesSlide8.xml><?xml version="1.0" encoding="utf-8"?>
 <p:notes xmlns:a="http://schemas.openxmlformats.org/drawingml/2006/main" xmlns:p="http://schemas.openxmlformats.org/presentationml/2006/main" xmlns:r="http://schemas.openxmlformats.org/officeDocument/2006/relationships">
   <p:cSld>
     <p:spTree>
@@ -4216,7 +4263,7 @@
                 </a:solidFill>
                 <a:latin typeface="Arial"/>
               </a:rPr>
-              <a:t>MODEL · THE COEFFICIENT LADDER (ALL DEVICE-FIT)</a:t>
+              <a:t>MODEL · V4 GO-CHAIN, MEASURED WINNER FOR R &gt;= 2</a:t>
             </a:r>
           </a:p>
         </p:txBody>
@@ -4255,50 +4302,35 @@
                 </a:solidFill>
                 <a:latin typeface="Arial"/>
               </a:rPr>
-              <a:t>Every per-word cost in the tier, pinned</a:t>
-            </a:r>
-          </a:p>
-        </p:txBody>
-      </p:sp>
-      <p:sp>
-        <p:nvSpPr>
-          <p:cNvPr id="4" name="TextBox 3"/>
-          <p:cNvSpPr txBox="1"/>
-          <p:nvPr/>
-        </p:nvSpPr>
-        <p:spPr>
-          <a:xfrm>
-            <a:off x="987552" y="2484882"/>
-            <a:ext cx="13539783" cy="1851660"/>
-          </a:xfrm>
-          <a:prstGeom prst="rect">
-            <a:avLst/>
-          </a:prstGeom>
-          <a:noFill/>
-        </p:spPr>
-        <p:txBody>
-          <a:bodyPr wrap="square" lIns="0" rIns="0" tIns="0" bIns="0" anchor="t">
-            <a:spAutoFit/>
-          </a:bodyPr>
-          <a:lstStyle/>
-          <a:p>
-            <a:pPr algn="l">
-              <a:lnSpc>
-                <a:spcPct val="108000"/>
-              </a:lnSpc>
-            </a:pPr>
-            <a:r>
-              <a:rPr sz="13500" b="1" u="none" i="0">
-                <a:solidFill>
-                  <a:srgbClr val="6D28D9"/>
-                </a:solidFill>
-                <a:latin typeface="Arial"/>
-              </a:rPr>
-              <a:t>39 anchors, &lt;1%</a:t>
-            </a:r>
-          </a:p>
-        </p:txBody>
-      </p:sp>
+              <a:t>v4 cost = endpoint baseline + router-only forwarding</a:t>
+            </a:r>
+          </a:p>
+        </p:txBody>
+      </p:sp>
+      <p:pic>
+        <p:nvPicPr>
+          <p:cNvPr id="4" name="figure" descr="fig_v4_model_topology.png"/>
+          <p:cNvPicPr>
+            <a:picLocks noChangeAspect="1"/>
+          </p:cNvPicPr>
+          <p:nvPr/>
+        </p:nvPicPr>
+        <p:blipFill>
+          <a:blip r:embed="rId2"/>
+          <a:stretch>
+            <a:fillRect/>
+          </a:stretch>
+        </p:blipFill>
+        <p:spPr>
+          <a:xfrm>
+            <a:off x="2981063" y="2484882"/>
+            <a:ext cx="12325873" cy="4944618"/>
+          </a:xfrm>
+          <a:prstGeom prst="rect">
+            <a:avLst/>
+          </a:prstGeom>
+        </p:spPr>
+      </p:pic>
       <p:sp>
         <p:nvSpPr>
           <p:cNvPr id="5" name="TextBox 4"/>
@@ -4307,8 +4339,8 @@
         </p:nvSpPr>
         <p:spPr>
           <a:xfrm>
-            <a:off x="15030255" y="2404872"/>
-            <a:ext cx="2270192" cy="2011680"/>
+            <a:off x="987552" y="7703820"/>
+            <a:ext cx="16312896" cy="653796"/>
           </a:xfrm>
           <a:prstGeom prst="rect">
             <a:avLst/>
@@ -4327,509 +4359,13 @@
               </a:lnSpc>
             </a:pPr>
             <a:r>
-              <a:rPr sz="2400" b="0" u="none" i="0">
-                <a:solidFill>
-                  <a:srgbClr val="52525B"/>
-                </a:solidFill>
-                <a:latin typeface="Arial"/>
-              </a:rPr>
-              <a:t>three device-fit models in one file: v3 0.89% / v5 0.83% / v4 0.23% max error</a:t>
-            </a:r>
-          </a:p>
-        </p:txBody>
-      </p:sp>
-      <p:sp>
-        <p:nvSpPr>
-          <p:cNvPr id="6" name="card"/>
-          <p:cNvSpPr/>
-          <p:nvPr/>
-        </p:nvSpPr>
-        <p:spPr>
-          <a:xfrm>
-            <a:off x="987552" y="4839462"/>
-            <a:ext cx="3797046" cy="2148840"/>
-          </a:xfrm>
-          <a:prstGeom prst="roundRect">
-            <a:avLst>
-              <a:gd name="adj" fmla="val 6195"/>
-            </a:avLst>
-          </a:prstGeom>
-          <a:solidFill>
-            <a:srgbClr val="F2EDFD"/>
-          </a:solidFill>
-          <a:ln>
-            <a:noFill/>
-          </a:ln>
-          <a:effectLst/>
-        </p:spPr>
-        <p:style>
-          <a:lnRef idx="1">
-            <a:schemeClr val="accent1"/>
-          </a:lnRef>
-          <a:fillRef idx="3">
-            <a:schemeClr val="accent1"/>
-          </a:fillRef>
-          <a:effectRef idx="2">
-            <a:schemeClr val="accent1"/>
-          </a:effectRef>
-          <a:fontRef idx="minor">
-            <a:schemeClr val="lt1"/>
-          </a:fontRef>
-        </p:style>
-        <p:txBody>
-          <a:bodyPr rtlCol="0" anchor="ctr"/>
-          <a:lstStyle/>
-          <a:p>
-            <a:pPr algn="ctr"/>
-          </a:p>
-        </p:txBody>
-      </p:sp>
-      <p:sp>
-        <p:nvSpPr>
-          <p:cNvPr id="7" name="TextBox 6"/>
-          <p:cNvSpPr txBox="1"/>
-          <p:nvPr/>
-        </p:nvSpPr>
-        <p:spPr>
-          <a:xfrm>
-            <a:off x="1371600" y="5177790"/>
-            <a:ext cx="3028950" cy="719328"/>
-          </a:xfrm>
-          <a:prstGeom prst="rect">
-            <a:avLst/>
-          </a:prstGeom>
-          <a:noFill/>
-        </p:spPr>
-        <p:txBody>
-          <a:bodyPr wrap="square" lIns="0" rIns="0" tIns="0" bIns="0" anchor="t">
-            <a:spAutoFit/>
-          </a:bodyPr>
-          <a:lstStyle/>
-          <a:p>
-            <a:pPr algn="l">
-              <a:lnSpc>
-                <a:spcPct val="118000"/>
-              </a:lnSpc>
-            </a:pPr>
-            <a:r>
-              <a:rPr sz="4800" b="1" u="none" i="0">
-                <a:solidFill>
-                  <a:srgbClr val="6D28D9"/>
-                </a:solidFill>
-                <a:latin typeface="Arial"/>
-              </a:rPr>
-              <a:t>75.4</a:t>
-            </a:r>
-          </a:p>
-        </p:txBody>
-      </p:sp>
-      <p:sp>
-        <p:nvSpPr>
-          <p:cNvPr id="8" name="TextBox 7"/>
-          <p:cNvSpPr txBox="1"/>
-          <p:nvPr/>
-        </p:nvSpPr>
-        <p:spPr>
-          <a:xfrm>
-            <a:off x="1371600" y="5991606"/>
-            <a:ext cx="3028950" cy="1307592"/>
-          </a:xfrm>
-          <a:prstGeom prst="rect">
-            <a:avLst/>
-          </a:prstGeom>
-          <a:noFill/>
-        </p:spPr>
-        <p:txBody>
-          <a:bodyPr wrap="square" lIns="0" rIns="0" tIns="0" bIns="0" anchor="t">
-            <a:spAutoFit/>
-          </a:bodyPr>
-          <a:lstStyle/>
-          <a:p>
-            <a:pPr algn="l">
-              <a:lnSpc>
-                <a:spcPct val="132000"/>
-              </a:lnSpc>
-            </a:pPr>
-            <a:r>
               <a:rPr sz="1950" b="0" u="none" i="0">
                 <a:solidFill>
-                  <a:srgbClr val="18181B"/>
-                </a:solidFill>
-                <a:latin typeface="Arial"/>
-              </a:rPr>
-              <a:t>c_fwd_word cyc/word: row-0 park receive + forward (receive-only was 43.3)</a:t>
-            </a:r>
-          </a:p>
-        </p:txBody>
-      </p:sp>
-      <p:sp>
-        <p:nvSpPr>
-          <p:cNvPr id="9" name="card"/>
-          <p:cNvSpPr/>
-          <p:nvPr/>
-        </p:nvSpPr>
-        <p:spPr>
-          <a:xfrm>
-            <a:off x="5159502" y="4839462"/>
-            <a:ext cx="3797046" cy="2148840"/>
-          </a:xfrm>
-          <a:prstGeom prst="roundRect">
-            <a:avLst>
-              <a:gd name="adj" fmla="val 6195"/>
-            </a:avLst>
-          </a:prstGeom>
-          <a:solidFill>
-            <a:srgbClr val="E9F0FE"/>
-          </a:solidFill>
-          <a:ln>
-            <a:noFill/>
-          </a:ln>
-          <a:effectLst/>
-        </p:spPr>
-        <p:style>
-          <a:lnRef idx="1">
-            <a:schemeClr val="accent1"/>
-          </a:lnRef>
-          <a:fillRef idx="3">
-            <a:schemeClr val="accent1"/>
-          </a:fillRef>
-          <a:effectRef idx="2">
-            <a:schemeClr val="accent1"/>
-          </a:effectRef>
-          <a:fontRef idx="minor">
-            <a:schemeClr val="lt1"/>
-          </a:fontRef>
-        </p:style>
-        <p:txBody>
-          <a:bodyPr rtlCol="0" anchor="ctr"/>
-          <a:lstStyle/>
-          <a:p>
-            <a:pPr algn="ctr"/>
-          </a:p>
-        </p:txBody>
-      </p:sp>
-      <p:sp>
-        <p:nvSpPr>
-          <p:cNvPr id="10" name="TextBox 9"/>
-          <p:cNvSpPr txBox="1"/>
-          <p:nvPr/>
-        </p:nvSpPr>
-        <p:spPr>
-          <a:xfrm>
-            <a:off x="5543550" y="5177790"/>
-            <a:ext cx="3028950" cy="719328"/>
-          </a:xfrm>
-          <a:prstGeom prst="rect">
-            <a:avLst/>
-          </a:prstGeom>
-          <a:noFill/>
-        </p:spPr>
-        <p:txBody>
-          <a:bodyPr wrap="square" lIns="0" rIns="0" tIns="0" bIns="0" anchor="t">
-            <a:spAutoFit/>
-          </a:bodyPr>
-          <a:lstStyle/>
-          <a:p>
-            <a:pPr algn="l">
-              <a:lnSpc>
-                <a:spcPct val="118000"/>
-              </a:lnSpc>
-            </a:pPr>
-            <a:r>
-              <a:rPr sz="4800" b="1" u="none" i="0">
-                <a:solidFill>
-                  <a:srgbClr val="1D4ED8"/>
-                </a:solidFill>
-                <a:latin typeface="Arial"/>
-              </a:rPr>
-              <a:t>28.8</a:t>
-            </a:r>
-          </a:p>
-        </p:txBody>
-      </p:sp>
-      <p:sp>
-        <p:nvSpPr>
-          <p:cNvPr id="11" name="TextBox 10"/>
-          <p:cNvSpPr txBox="1"/>
-          <p:nvPr/>
-        </p:nvSpPr>
-        <p:spPr>
-          <a:xfrm>
-            <a:off x="5543550" y="5991606"/>
-            <a:ext cx="3028950" cy="980694"/>
-          </a:xfrm>
-          <a:prstGeom prst="rect">
-            <a:avLst/>
-          </a:prstGeom>
-          <a:noFill/>
-        </p:spPr>
-        <p:txBody>
-          <a:bodyPr wrap="square" lIns="0" rIns="0" tIns="0" bIns="0" anchor="t">
-            <a:spAutoFit/>
-          </a:bodyPr>
-          <a:lstStyle/>
-          <a:p>
-            <a:pPr algn="l">
-              <a:lnSpc>
-                <a:spcPct val="132000"/>
-              </a:lnSpc>
-            </a:pPr>
-            <a:r>
-              <a:rPr sz="1950" b="0" u="none" i="0">
-                <a:solidFill>
-                  <a:srgbClr val="18181B"/>
-                </a:solidFill>
-                <a:latin typeface="Arial"/>
-              </a:rPr>
-              <a:t>c_relay_word cyc/word: row-0 reload relay (bare emit loop: 13.0)</a:t>
-            </a:r>
-          </a:p>
-        </p:txBody>
-      </p:sp>
-      <p:sp>
-        <p:nvSpPr>
-          <p:cNvPr id="12" name="card"/>
-          <p:cNvSpPr/>
-          <p:nvPr/>
-        </p:nvSpPr>
-        <p:spPr>
-          <a:xfrm>
-            <a:off x="9331452" y="4839462"/>
-            <a:ext cx="3797046" cy="2148840"/>
-          </a:xfrm>
-          <a:prstGeom prst="roundRect">
-            <a:avLst>
-              <a:gd name="adj" fmla="val 6195"/>
-            </a:avLst>
-          </a:prstGeom>
-          <a:solidFill>
-            <a:srgbClr val="E5F4EE"/>
-          </a:solidFill>
-          <a:ln>
-            <a:noFill/>
-          </a:ln>
-          <a:effectLst/>
-        </p:spPr>
-        <p:style>
-          <a:lnRef idx="1">
-            <a:schemeClr val="accent1"/>
-          </a:lnRef>
-          <a:fillRef idx="3">
-            <a:schemeClr val="accent1"/>
-          </a:fillRef>
-          <a:effectRef idx="2">
-            <a:schemeClr val="accent1"/>
-          </a:effectRef>
-          <a:fontRef idx="minor">
-            <a:schemeClr val="lt1"/>
-          </a:fontRef>
-        </p:style>
-        <p:txBody>
-          <a:bodyPr rtlCol="0" anchor="ctr"/>
-          <a:lstStyle/>
-          <a:p>
-            <a:pPr algn="ctr"/>
-          </a:p>
-        </p:txBody>
-      </p:sp>
-      <p:sp>
-        <p:nvSpPr>
-          <p:cNvPr id="13" name="TextBox 12"/>
-          <p:cNvSpPr txBox="1"/>
-          <p:nvPr/>
-        </p:nvSpPr>
-        <p:spPr>
-          <a:xfrm>
-            <a:off x="9715500" y="5177790"/>
-            <a:ext cx="3028950" cy="719328"/>
-          </a:xfrm>
-          <a:prstGeom prst="rect">
-            <a:avLst/>
-          </a:prstGeom>
-          <a:noFill/>
-        </p:spPr>
-        <p:txBody>
-          <a:bodyPr wrap="square" lIns="0" rIns="0" tIns="0" bIns="0" anchor="t">
-            <a:spAutoFit/>
-          </a:bodyPr>
-          <a:lstStyle/>
-          <a:p>
-            <a:pPr algn="l">
-              <a:lnSpc>
-                <a:spcPct val="118000"/>
-              </a:lnSpc>
-            </a:pPr>
-            <a:r>
-              <a:rPr sz="4800" b="1" u="none" i="0">
-                <a:solidFill>
-                  <a:srgbClr val="047857"/>
-                </a:solidFill>
-                <a:latin typeface="Arial"/>
-              </a:rPr>
-              <a:t>1.1 vs 31</a:t>
-            </a:r>
-          </a:p>
-        </p:txBody>
-      </p:sp>
-      <p:sp>
-        <p:nvSpPr>
-          <p:cNvPr id="14" name="TextBox 13"/>
-          <p:cNvSpPr txBox="1"/>
-          <p:nvPr/>
-        </p:nvSpPr>
-        <p:spPr>
-          <a:xfrm>
-            <a:off x="9715500" y="5991606"/>
-            <a:ext cx="3028950" cy="980694"/>
-          </a:xfrm>
-          <a:prstGeom prst="rect">
-            <a:avLst/>
-          </a:prstGeom>
-          <a:noFill/>
-        </p:spPr>
-        <p:txBody>
-          <a:bodyPr wrap="square" lIns="0" rIns="0" tIns="0" bIns="0" anchor="t">
-            <a:spAutoFit/>
-          </a:bodyPr>
-          <a:lstStyle/>
-          <a:p>
-            <a:pPr algn="l">
-              <a:lnSpc>
-                <a:spcPct val="132000"/>
-              </a:lnSpc>
-            </a:pPr>
-            <a:r>
-              <a:rPr sz="1950" b="0" u="none" i="0">
-                <a:solidFill>
-                  <a:srgbClr val="18181B"/>
-                </a:solidFill>
-                <a:latin typeface="Arial"/>
-              </a:rPr>
-              <a:t>multirow tax cyc/word, task: v4 router transit vs v5 CE store-and-forward</a:t>
-            </a:r>
-          </a:p>
-        </p:txBody>
-      </p:sp>
-      <p:sp>
-        <p:nvSpPr>
-          <p:cNvPr id="15" name="card"/>
-          <p:cNvSpPr/>
-          <p:nvPr/>
-        </p:nvSpPr>
-        <p:spPr>
-          <a:xfrm>
-            <a:off x="13503402" y="4839462"/>
-            <a:ext cx="3797046" cy="2148840"/>
-          </a:xfrm>
-          <a:prstGeom prst="roundRect">
-            <a:avLst>
-              <a:gd name="adj" fmla="val 6195"/>
-            </a:avLst>
-          </a:prstGeom>
-          <a:solidFill>
-            <a:srgbClr val="F4F4F5"/>
-          </a:solidFill>
-          <a:ln>
-            <a:noFill/>
-          </a:ln>
-          <a:effectLst/>
-        </p:spPr>
-        <p:style>
-          <a:lnRef idx="1">
-            <a:schemeClr val="accent1"/>
-          </a:lnRef>
-          <a:fillRef idx="3">
-            <a:schemeClr val="accent1"/>
-          </a:fillRef>
-          <a:effectRef idx="2">
-            <a:schemeClr val="accent1"/>
-          </a:effectRef>
-          <a:fontRef idx="minor">
-            <a:schemeClr val="lt1"/>
-          </a:fontRef>
-        </p:style>
-        <p:txBody>
-          <a:bodyPr rtlCol="0" anchor="ctr"/>
-          <a:lstStyle/>
-          <a:p>
-            <a:pPr algn="ctr"/>
-          </a:p>
-        </p:txBody>
-      </p:sp>
-      <p:sp>
-        <p:nvSpPr>
-          <p:cNvPr id="16" name="TextBox 15"/>
-          <p:cNvSpPr txBox="1"/>
-          <p:nvPr/>
-        </p:nvSpPr>
-        <p:spPr>
-          <a:xfrm>
-            <a:off x="13887450" y="5177790"/>
-            <a:ext cx="3028950" cy="719328"/>
-          </a:xfrm>
-          <a:prstGeom prst="rect">
-            <a:avLst/>
-          </a:prstGeom>
-          <a:noFill/>
-        </p:spPr>
-        <p:txBody>
-          <a:bodyPr wrap="square" lIns="0" rIns="0" tIns="0" bIns="0" anchor="t">
-            <a:spAutoFit/>
-          </a:bodyPr>
-          <a:lstStyle/>
-          <a:p>
-            <a:pPr algn="l">
-              <a:lnSpc>
-                <a:spcPct val="118000"/>
-              </a:lnSpc>
-            </a:pPr>
-            <a:r>
-              <a:rPr sz="4800" b="1" u="none" i="0">
-                <a:solidFill>
-                  <a:srgbClr val="18181B"/>
-                </a:solidFill>
-                <a:latin typeface="Arial"/>
-              </a:rPr>
-              <a:t>+9.6 / +1.6</a:t>
-            </a:r>
-          </a:p>
-        </p:txBody>
-      </p:sp>
-      <p:sp>
-        <p:nvSpPr>
-          <p:cNvPr id="17" name="TextBox 16"/>
-          <p:cNvSpPr txBox="1"/>
-          <p:nvPr/>
-        </p:nvSpPr>
-        <p:spPr>
-          <a:xfrm>
-            <a:off x="13887450" y="5991606"/>
-            <a:ext cx="3028950" cy="980694"/>
-          </a:xfrm>
-          <a:prstGeom prst="rect">
-            <a:avLst/>
-          </a:prstGeom>
-          <a:noFill/>
-        </p:spPr>
-        <p:txBody>
-          <a:bodyPr wrap="square" lIns="0" rIns="0" tIns="0" bIns="0" anchor="t">
-            <a:spAutoFit/>
-          </a:bodyPr>
-          <a:lstStyle/>
-          <a:p>
-            <a:pPr algn="l">
-              <a:lnSpc>
-                <a:spcPct val="132000"/>
-              </a:lnSpc>
-            </a:pPr>
-            <a:r>
-              <a:rPr sz="1950" b="0" u="none" i="0">
-                <a:solidFill>
-                  <a:srgbClr val="18181B"/>
-                </a:solidFill>
-                <a:latin typeface="Arial"/>
-              </a:rPr>
-              <a:t>always-on R=1 premium over v3, cyc/word: v4 roles / v5 cascade branches</a:t>
+                  <a:srgbClr val="A1A1AA"/>
+                </a:solidFill>
+                <a:latin typeface="Arial"/>
+              </a:rPr>
+              <a:t>Generic equation first, fitted coefficients second, topology at right. Setting: N=256, E&gt;=64; pairs are task | owner-side bulk-DSD. v4 epoch_sum excludes small inter-epoch GO gaps.</a:t>
             </a:r>
           </a:p>
         </p:txBody>
@@ -4843,6 +4379,165 @@
 </file>
 
 <file path=ppt/slides/slide7.xml><?xml version="1.0" encoding="utf-8"?>
+<p:sld xmlns:a="http://schemas.openxmlformats.org/drawingml/2006/main" xmlns:p="http://schemas.openxmlformats.org/presentationml/2006/main" xmlns:r="http://schemas.openxmlformats.org/officeDocument/2006/relationships">
+  <p:cSld>
+    <p:spTree>
+      <p:nvGrpSpPr>
+        <p:cNvPr id="1" name=""/>
+        <p:cNvGrpSpPr/>
+        <p:nvPr/>
+      </p:nvGrpSpPr>
+      <p:grpSpPr/>
+      <p:sp>
+        <p:nvSpPr>
+          <p:cNvPr id="2" name="TextBox 1"/>
+          <p:cNvSpPr txBox="1"/>
+          <p:nvPr/>
+        </p:nvSpPr>
+        <p:spPr>
+          <a:xfrm>
+            <a:off x="987552" y="914400"/>
+            <a:ext cx="16312896" cy="301752"/>
+          </a:xfrm>
+          <a:prstGeom prst="rect">
+            <a:avLst/>
+          </a:prstGeom>
+          <a:noFill/>
+        </p:spPr>
+        <p:txBody>
+          <a:bodyPr wrap="square" lIns="0" rIns="0" tIns="0" bIns="0" anchor="t">
+            <a:spAutoFit/>
+          </a:bodyPr>
+          <a:lstStyle/>
+          <a:p>
+            <a:pPr algn="l">
+              <a:lnSpc>
+                <a:spcPct val="132000"/>
+              </a:lnSpc>
+            </a:pPr>
+            <a:r>
+              <a:rPr sz="1800" b="0" u="none" i="0" spc="150">
+                <a:solidFill>
+                  <a:srgbClr val="A1A1AA"/>
+                </a:solidFill>
+                <a:latin typeface="Arial"/>
+              </a:rPr>
+              <a:t>MECHANISM · ROUTER TRANSIT VS CE PROCESSING</a:t>
+            </a:r>
+          </a:p>
+        </p:txBody>
+      </p:sp>
+      <p:sp>
+        <p:nvSpPr>
+          <p:cNvPr id="3" name="TextBox 2"/>
+          <p:cNvSpPr txBox="1"/>
+          <p:nvPr/>
+        </p:nvSpPr>
+        <p:spPr>
+          <a:xfrm>
+            <a:off x="987552" y="1371600"/>
+            <a:ext cx="16312896" cy="674369"/>
+          </a:xfrm>
+          <a:prstGeom prst="rect">
+            <a:avLst/>
+          </a:prstGeom>
+          <a:noFill/>
+        </p:spPr>
+        <p:txBody>
+          <a:bodyPr wrap="square" lIns="0" rIns="0" tIns="0" bIns="0" anchor="t">
+            <a:spAutoFit/>
+          </a:bodyPr>
+          <a:lstStyle/>
+          <a:p>
+            <a:pPr algn="l">
+              <a:lnSpc>
+                <a:spcPct val="118000"/>
+              </a:lnSpc>
+            </a:pPr>
+            <a:r>
+              <a:rPr sz="4500" b="0" u="none" i="0">
+                <a:solidFill>
+                  <a:srgbClr val="18181B"/>
+                </a:solidFill>
+                <a:latin typeface="Arial"/>
+              </a:rPr>
+              <a:t>The fabric is not binding: CE per-word handling dominates</a:t>
+            </a:r>
+          </a:p>
+        </p:txBody>
+      </p:sp>
+      <p:pic>
+        <p:nvPicPr>
+          <p:cNvPr id="4" name="figure" descr="fig_router_vs_ce.png"/>
+          <p:cNvPicPr>
+            <a:picLocks noChangeAspect="1"/>
+          </p:cNvPicPr>
+          <p:nvPr/>
+        </p:nvPicPr>
+        <p:blipFill>
+          <a:blip r:embed="rId2"/>
+          <a:stretch>
+            <a:fillRect/>
+          </a:stretch>
+        </p:blipFill>
+        <p:spPr>
+          <a:xfrm>
+            <a:off x="3865667" y="2484882"/>
+            <a:ext cx="10556665" cy="4944618"/>
+          </a:xfrm>
+          <a:prstGeom prst="rect">
+            <a:avLst/>
+          </a:prstGeom>
+        </p:spPr>
+      </p:pic>
+      <p:sp>
+        <p:nvSpPr>
+          <p:cNvPr id="5" name="TextBox 4"/>
+          <p:cNvSpPr txBox="1"/>
+          <p:nvPr/>
+        </p:nvSpPr>
+        <p:spPr>
+          <a:xfrm>
+            <a:off x="987552" y="7703820"/>
+            <a:ext cx="16312896" cy="653796"/>
+          </a:xfrm>
+          <a:prstGeom prst="rect">
+            <a:avLst/>
+          </a:prstGeom>
+          <a:noFill/>
+        </p:spPr>
+        <p:txBody>
+          <a:bodyPr wrap="square" lIns="0" rIns="0" tIns="0" bIns="0" anchor="t">
+            <a:spAutoFit/>
+          </a:bodyPr>
+          <a:lstStyle/>
+          <a:p>
+            <a:pPr algn="l">
+              <a:lnSpc>
+                <a:spcPct val="132000"/>
+              </a:lnSpc>
+            </a:pPr>
+            <a:r>
+              <a:rPr sz="1950" b="0" u="none" i="0">
+                <a:solidFill>
+                  <a:srgbClr val="A1A1AA"/>
+                </a:solidFill>
+                <a:latin typeface="Arial"/>
+              </a:rPr>
+              <a:t>Router-only means switch-to-switch transit with no RAMP, IQ/task, CE landing, or local copy/re-emit. It still consumes links and can backpressure; current measurements are isolated, single-lane runs.</a:t>
+            </a:r>
+          </a:p>
+        </p:txBody>
+      </p:sp>
+    </p:spTree>
+  </p:cSld>
+  <p:clrMapOvr>
+    <a:masterClrMapping/>
+  </p:clrMapOvr>
+</p:sld>
+</file>
+
+<file path=ppt/slides/slide8.xml><?xml version="1.0" encoding="utf-8"?>
 <p:sld xmlns:a="http://schemas.openxmlformats.org/drawingml/2006/main" xmlns:p="http://schemas.openxmlformats.org/presentationml/2006/main" xmlns:r="http://schemas.openxmlformats.org/officeDocument/2006/relationships">
   <p:cSld>
     <p:spTree>

--- a/projects/WaferEngine-staging/meetings/2026-08-24.pptx
+++ b/projects/WaferEngine-staging/meetings/2026-08-24.pptx
@@ -415,7 +415,7 @@
           <a:lstStyle/>
           <a:p>
             <a:r>
-              <a:t>EPCC CS-3, distance=1, n=3 per cell, zero infrastructure failures across 81 runs; every cell reproduced to the cycle. E = words per PE (E=64 ~ L=1024 tokens at lpb=4; E=512 ~ L=8192). v4 metric = sum of per-band spans (excludes inter-epoch GO gaps, ~2*bh cycles each). dsd = owner-side bulk fabin-DSD reload receive (Exp-B mechanism). Crossover: each design pays an always-on R=1 premium over v3 (v4 ~ +9.6 cyc/word for role machinery, v5 ~ +1.6 for cascade branches), but for R&gt;=2 v4's cheap transit dominates: dsd E=512 R=4 is 30% faster than v5.</a:t>
+              <a:t>EPCC CS-3, distance=1, n=3 per cell, zero infrastructure failures across 81 runs; every cell reproduced to the cycle. Visible payload labels replace benchmark notation: with compute-column height N=256 and lpb=4, E=64 u32 words/compute PE maps to 1,024 KV tokens and E=512 maps to 8,192. R is the number of 1×256 storage rows. Capacity is nominal analytical sizing, not compile-fit: 42 KiB/storage PE gives 672 KV-token equivalents per row/block, so R=1/2/4 gives 672/1,344/2,688 tokens. The demo verifies movement rather than retaining the full payload; therefore the 8,192-token rows shown are intentionally capacity-undersized measurements (about 13 rows are needed nominally). v4 metric = sum of per-band spans (excludes inter-epoch GO gaps, ~2*bh cycles each). DSD = owner-side bulk fabin-DSD reload receive. v4 wins every measured R&gt;=2 cell; DSD 8,192-token payload at R=4 is 30% faster than v5.</a:t>
             </a:r>
           </a:p>
         </p:txBody>
@@ -1860,7 +1860,7 @@
                 </a:solidFill>
                 <a:latin typeface="Arial"/>
               </a:rPr>
-              <a:t>RESULTS · 81 RUNS, EVERY CELL N=3 WITH 0-CYCLE SPREAD</a:t>
+              <a:t>CAPACITY · NOMINAL 42 KIB/STORAGE PE = 672 KV-TOKEN EQUIVALENTS PER 1×256 ROW/BLOCK</a:t>
             </a:r>
           </a:p>
         </p:txBody>
@@ -1899,7 +1899,7 @@
                 </a:solidFill>
                 <a:latin typeface="Arial"/>
               </a:rPr>
-              <a:t>Full park+reload cycle (cycles): v5 wins single-row, v4 wins every multi-row cell</a:t>
+              <a:t>Each row adds 672-token capacity; v4 wins every multi-row setting</a:t>
             </a:r>
           </a:p>
         </p:txBody>
@@ -1913,7 +1913,7 @@
         <p:spPr>
           <a:xfrm>
             <a:off x="987552" y="3159251"/>
-            <a:ext cx="3934206" cy="326898"/>
+            <a:ext cx="3361037" cy="326898"/>
           </a:xfrm>
           <a:prstGeom prst="rect">
             <a:avLst/>
@@ -1938,7 +1938,7 @@
                 </a:solidFill>
                 <a:latin typeface="Arial"/>
               </a:rPr>
-              <a:t>CONFIG (N=256)</a:t>
+              <a:t>KV MOVED</a:t>
             </a:r>
           </a:p>
         </p:txBody>
@@ -1951,8 +1951,8 @@
         </p:nvSpPr>
         <p:spPr>
           <a:xfrm>
-            <a:off x="5113782" y="3159251"/>
-            <a:ext cx="3934206" cy="326898"/>
+            <a:off x="4540613" y="3159251"/>
+            <a:ext cx="3781167" cy="326898"/>
           </a:xfrm>
           <a:prstGeom prst="rect">
             <a:avLst/>
@@ -1977,6 +1977,45 @@
                 </a:solidFill>
                 <a:latin typeface="Arial"/>
               </a:rPr>
+              <a:t>ROWS · CAPACITY</a:t>
+            </a:r>
+          </a:p>
+        </p:txBody>
+      </p:sp>
+      <p:sp>
+        <p:nvSpPr>
+          <p:cNvPr id="6" name="TextBox 5"/>
+          <p:cNvSpPr txBox="1"/>
+          <p:nvPr/>
+        </p:nvSpPr>
+        <p:spPr>
+          <a:xfrm>
+            <a:off x="8513805" y="3159251"/>
+            <a:ext cx="2800864" cy="326898"/>
+          </a:xfrm>
+          <a:prstGeom prst="rect">
+            <a:avLst/>
+          </a:prstGeom>
+          <a:noFill/>
+        </p:spPr>
+        <p:txBody>
+          <a:bodyPr wrap="square" lIns="0" rIns="0" tIns="0" bIns="0" anchor="t">
+            <a:spAutoFit/>
+          </a:bodyPr>
+          <a:lstStyle/>
+          <a:p>
+            <a:pPr algn="l">
+              <a:lnSpc>
+                <a:spcPct val="132000"/>
+              </a:lnSpc>
+            </a:pPr>
+            <a:r>
+              <a:rPr sz="1950" b="0" u="none" i="0" spc="150">
+                <a:solidFill>
+                  <a:srgbClr val="A1A1AA"/>
+                </a:solidFill>
+                <a:latin typeface="Arial"/>
+              </a:rPr>
               <a:t>V3 SINGLE-ROW</a:t>
             </a:r>
           </a:p>
@@ -1984,14 +2023,14 @@
       </p:sp>
       <p:sp>
         <p:nvSpPr>
-          <p:cNvPr id="6" name="TextBox 5"/>
-          <p:cNvSpPr txBox="1"/>
-          <p:nvPr/>
-        </p:nvSpPr>
-        <p:spPr>
-          <a:xfrm>
-            <a:off x="9240012" y="3159251"/>
-            <a:ext cx="3934206" cy="326898"/>
+          <p:cNvPr id="7" name="TextBox 6"/>
+          <p:cNvSpPr txBox="1"/>
+          <p:nvPr/>
+        </p:nvSpPr>
+        <p:spPr>
+          <a:xfrm>
+            <a:off x="11506694" y="3159251"/>
+            <a:ext cx="2800864" cy="326898"/>
           </a:xfrm>
           <a:prstGeom prst="rect">
             <a:avLst/>
@@ -2023,14 +2062,14 @@
       </p:sp>
       <p:sp>
         <p:nvSpPr>
-          <p:cNvPr id="7" name="TextBox 6"/>
-          <p:cNvSpPr txBox="1"/>
-          <p:nvPr/>
-        </p:nvSpPr>
-        <p:spPr>
-          <a:xfrm>
-            <a:off x="13366242" y="3159251"/>
-            <a:ext cx="3934206" cy="326898"/>
+          <p:cNvPr id="8" name="TextBox 7"/>
+          <p:cNvSpPr txBox="1"/>
+          <p:nvPr/>
+        </p:nvSpPr>
+        <p:spPr>
+          <a:xfrm>
+            <a:off x="14499583" y="3159251"/>
+            <a:ext cx="2800864" cy="326898"/>
           </a:xfrm>
           <a:prstGeom prst="rect">
             <a:avLst/>
@@ -2062,14 +2101,14 @@
       </p:sp>
       <p:sp>
         <p:nvSpPr>
-          <p:cNvPr id="8" name="rule"/>
+          <p:cNvPr id="9" name="rule"/>
           <p:cNvSpPr/>
           <p:nvPr/>
         </p:nvSpPr>
         <p:spPr>
           <a:xfrm>
             <a:off x="987552" y="3625596"/>
-            <a:ext cx="3934206" cy="10972"/>
+            <a:ext cx="3361037" cy="10972"/>
           </a:xfrm>
           <a:prstGeom prst="rect">
             <a:avLst/>
@@ -2106,14 +2145,14 @@
       </p:sp>
       <p:sp>
         <p:nvSpPr>
-          <p:cNvPr id="9" name="TextBox 8"/>
+          <p:cNvPr id="10" name="TextBox 9"/>
           <p:cNvSpPr txBox="1"/>
           <p:nvPr/>
         </p:nvSpPr>
         <p:spPr>
           <a:xfrm>
             <a:off x="987552" y="3863339"/>
-            <a:ext cx="3934206" cy="402336"/>
+            <a:ext cx="3361037" cy="402336"/>
           </a:xfrm>
           <a:prstGeom prst="rect">
             <a:avLst/>
@@ -2138,21 +2177,21 @@
                 </a:solidFill>
                 <a:latin typeface="Arial"/>
               </a:rPr>
-              <a:t>task E=64 · R=1</a:t>
-            </a:r>
-          </a:p>
-        </p:txBody>
-      </p:sp>
-      <p:sp>
-        <p:nvSpPr>
-          <p:cNvPr id="10" name="rule"/>
+              <a:t>task · 1,024 tok</a:t>
+            </a:r>
+          </a:p>
+        </p:txBody>
+      </p:sp>
+      <p:sp>
+        <p:nvSpPr>
+          <p:cNvPr id="11" name="rule"/>
           <p:cNvSpPr/>
           <p:nvPr/>
         </p:nvSpPr>
         <p:spPr>
           <a:xfrm>
-            <a:off x="5113782" y="3625596"/>
-            <a:ext cx="3934206" cy="10972"/>
+            <a:off x="4540613" y="3625596"/>
+            <a:ext cx="3781167" cy="10972"/>
           </a:xfrm>
           <a:prstGeom prst="rect">
             <a:avLst/>
@@ -2189,14 +2228,14 @@
       </p:sp>
       <p:sp>
         <p:nvSpPr>
-          <p:cNvPr id="11" name="TextBox 10"/>
-          <p:cNvSpPr txBox="1"/>
-          <p:nvPr/>
-        </p:nvSpPr>
-        <p:spPr>
-          <a:xfrm>
-            <a:off x="5113782" y="3863339"/>
-            <a:ext cx="3934206" cy="326898"/>
+          <p:cNvPr id="12" name="TextBox 11"/>
+          <p:cNvSpPr txBox="1"/>
+          <p:nvPr/>
+        </p:nvSpPr>
+        <p:spPr>
+          <a:xfrm>
+            <a:off x="4540613" y="3863339"/>
+            <a:ext cx="3781167" cy="326898"/>
           </a:xfrm>
           <a:prstGeom prst="rect">
             <a:avLst/>
@@ -2221,21 +2260,21 @@
                 </a:solidFill>
                 <a:latin typeface="Arial"/>
               </a:rPr>
-              <a:t>1,388,470</a:t>
-            </a:r>
-          </a:p>
-        </p:txBody>
-      </p:sp>
-      <p:sp>
-        <p:nvSpPr>
-          <p:cNvPr id="12" name="rule"/>
+              <a:t>1 · 672 tok (under)</a:t>
+            </a:r>
+          </a:p>
+        </p:txBody>
+      </p:sp>
+      <p:sp>
+        <p:nvSpPr>
+          <p:cNvPr id="13" name="rule"/>
           <p:cNvSpPr/>
           <p:nvPr/>
         </p:nvSpPr>
         <p:spPr>
           <a:xfrm>
-            <a:off x="9240012" y="3625596"/>
-            <a:ext cx="3934206" cy="10972"/>
+            <a:off x="8513805" y="3625596"/>
+            <a:ext cx="2800864" cy="10972"/>
           </a:xfrm>
           <a:prstGeom prst="rect">
             <a:avLst/>
@@ -2272,14 +2311,14 @@
       </p:sp>
       <p:sp>
         <p:nvSpPr>
-          <p:cNvPr id="13" name="TextBox 12"/>
-          <p:cNvSpPr txBox="1"/>
-          <p:nvPr/>
-        </p:nvSpPr>
-        <p:spPr>
-          <a:xfrm>
-            <a:off x="9240012" y="3863339"/>
-            <a:ext cx="3934206" cy="326898"/>
+          <p:cNvPr id="14" name="TextBox 13"/>
+          <p:cNvSpPr txBox="1"/>
+          <p:nvPr/>
+        </p:nvSpPr>
+        <p:spPr>
+          <a:xfrm>
+            <a:off x="8513805" y="3863339"/>
+            <a:ext cx="2800864" cy="326898"/>
           </a:xfrm>
           <a:prstGeom prst="rect">
             <a:avLst/>
@@ -2304,21 +2343,21 @@
                 </a:solidFill>
                 <a:latin typeface="Arial"/>
               </a:rPr>
-              <a:t>1,535,920</a:t>
-            </a:r>
-          </a:p>
-        </p:txBody>
-      </p:sp>
-      <p:sp>
-        <p:nvSpPr>
-          <p:cNvPr id="14" name="rule"/>
+              <a:t>1,388,470</a:t>
+            </a:r>
+          </a:p>
+        </p:txBody>
+      </p:sp>
+      <p:sp>
+        <p:nvSpPr>
+          <p:cNvPr id="15" name="rule"/>
           <p:cNvSpPr/>
           <p:nvPr/>
         </p:nvSpPr>
         <p:spPr>
           <a:xfrm>
-            <a:off x="13366242" y="3625596"/>
-            <a:ext cx="3934206" cy="10972"/>
+            <a:off x="11506694" y="3625596"/>
+            <a:ext cx="2800864" cy="10972"/>
           </a:xfrm>
           <a:prstGeom prst="rect">
             <a:avLst/>
@@ -2355,14 +2394,14 @@
       </p:sp>
       <p:sp>
         <p:nvSpPr>
-          <p:cNvPr id="15" name="TextBox 14"/>
-          <p:cNvSpPr txBox="1"/>
-          <p:nvPr/>
-        </p:nvSpPr>
-        <p:spPr>
-          <a:xfrm>
-            <a:off x="13366242" y="3863339"/>
-            <a:ext cx="3934206" cy="326898"/>
+          <p:cNvPr id="16" name="TextBox 15"/>
+          <p:cNvSpPr txBox="1"/>
+          <p:nvPr/>
+        </p:nvSpPr>
+        <p:spPr>
+          <a:xfrm>
+            <a:off x="11506694" y="3863339"/>
+            <a:ext cx="2800864" cy="326898"/>
           </a:xfrm>
           <a:prstGeom prst="rect">
             <a:avLst/>
@@ -2387,21 +2426,21 @@
                 </a:solidFill>
                 <a:latin typeface="Arial"/>
               </a:rPr>
-              <a:t>1,420,244</a:t>
-            </a:r>
-          </a:p>
-        </p:txBody>
-      </p:sp>
-      <p:sp>
-        <p:nvSpPr>
-          <p:cNvPr id="16" name="rule"/>
+              <a:t>1,535,920</a:t>
+            </a:r>
+          </a:p>
+        </p:txBody>
+      </p:sp>
+      <p:sp>
+        <p:nvSpPr>
+          <p:cNvPr id="17" name="rule"/>
           <p:cNvSpPr/>
           <p:nvPr/>
         </p:nvSpPr>
         <p:spPr>
           <a:xfrm>
-            <a:off x="987552" y="4423409"/>
-            <a:ext cx="3934206" cy="10972"/>
+            <a:off x="14499583" y="3625596"/>
+            <a:ext cx="2800864" cy="10972"/>
           </a:xfrm>
           <a:prstGeom prst="rect">
             <a:avLst/>
@@ -2438,14 +2477,14 @@
       </p:sp>
       <p:sp>
         <p:nvSpPr>
-          <p:cNvPr id="17" name="TextBox 16"/>
-          <p:cNvSpPr txBox="1"/>
-          <p:nvPr/>
-        </p:nvSpPr>
-        <p:spPr>
-          <a:xfrm>
-            <a:off x="987552" y="4661153"/>
-            <a:ext cx="3934206" cy="402336"/>
+          <p:cNvPr id="18" name="TextBox 17"/>
+          <p:cNvSpPr txBox="1"/>
+          <p:nvPr/>
+        </p:nvSpPr>
+        <p:spPr>
+          <a:xfrm>
+            <a:off x="14499583" y="3863339"/>
+            <a:ext cx="2800864" cy="326898"/>
           </a:xfrm>
           <a:prstGeom prst="rect">
             <a:avLst/>
@@ -2464,27 +2503,27 @@
               </a:lnSpc>
             </a:pPr>
             <a:r>
-              <a:rPr sz="2400" b="0" u="none" i="0">
-                <a:solidFill>
-                  <a:srgbClr val="18181B"/>
-                </a:solidFill>
-                <a:latin typeface="Arial"/>
-              </a:rPr>
-              <a:t>task E=64 · R=2</a:t>
-            </a:r>
-          </a:p>
-        </p:txBody>
-      </p:sp>
-      <p:sp>
-        <p:nvSpPr>
-          <p:cNvPr id="18" name="rule"/>
+              <a:rPr sz="1950" b="0" u="none" i="0">
+                <a:solidFill>
+                  <a:srgbClr val="52525B"/>
+                </a:solidFill>
+                <a:latin typeface="Arial"/>
+              </a:rPr>
+              <a:t>1,420,244</a:t>
+            </a:r>
+          </a:p>
+        </p:txBody>
+      </p:sp>
+      <p:sp>
+        <p:nvSpPr>
+          <p:cNvPr id="19" name="rule"/>
           <p:cNvSpPr/>
           <p:nvPr/>
         </p:nvSpPr>
         <p:spPr>
           <a:xfrm>
-            <a:off x="5113782" y="4423409"/>
-            <a:ext cx="3934206" cy="10972"/>
+            <a:off x="987552" y="4423409"/>
+            <a:ext cx="3361037" cy="10972"/>
           </a:xfrm>
           <a:prstGeom prst="rect">
             <a:avLst/>
@@ -2521,14 +2560,14 @@
       </p:sp>
       <p:sp>
         <p:nvSpPr>
-          <p:cNvPr id="19" name="TextBox 18"/>
-          <p:cNvSpPr txBox="1"/>
-          <p:nvPr/>
-        </p:nvSpPr>
-        <p:spPr>
-          <a:xfrm>
-            <a:off x="5113782" y="4661153"/>
-            <a:ext cx="3934206" cy="326898"/>
+          <p:cNvPr id="20" name="TextBox 19"/>
+          <p:cNvSpPr txBox="1"/>
+          <p:nvPr/>
+        </p:nvSpPr>
+        <p:spPr>
+          <a:xfrm>
+            <a:off x="987552" y="4661153"/>
+            <a:ext cx="3361037" cy="402336"/>
           </a:xfrm>
           <a:prstGeom prst="rect">
             <a:avLst/>
@@ -2547,27 +2586,27 @@
               </a:lnSpc>
             </a:pPr>
             <a:r>
-              <a:rPr sz="1950" b="0" u="none" i="0">
-                <a:solidFill>
-                  <a:srgbClr val="52525B"/>
-                </a:solidFill>
-                <a:latin typeface="Arial"/>
-              </a:rPr>
-              <a:t>—</a:t>
-            </a:r>
-          </a:p>
-        </p:txBody>
-      </p:sp>
-      <p:sp>
-        <p:nvSpPr>
-          <p:cNvPr id="20" name="rule"/>
+              <a:rPr sz="2400" b="0" u="none" i="0">
+                <a:solidFill>
+                  <a:srgbClr val="18181B"/>
+                </a:solidFill>
+                <a:latin typeface="Arial"/>
+              </a:rPr>
+              <a:t>task · 1,024 tok</a:t>
+            </a:r>
+          </a:p>
+        </p:txBody>
+      </p:sp>
+      <p:sp>
+        <p:nvSpPr>
+          <p:cNvPr id="21" name="rule"/>
           <p:cNvSpPr/>
           <p:nvPr/>
         </p:nvSpPr>
         <p:spPr>
           <a:xfrm>
-            <a:off x="9240012" y="4423409"/>
-            <a:ext cx="3934206" cy="10972"/>
+            <a:off x="4540613" y="4423409"/>
+            <a:ext cx="3781167" cy="10972"/>
           </a:xfrm>
           <a:prstGeom prst="rect">
             <a:avLst/>
@@ -2604,14 +2643,14 @@
       </p:sp>
       <p:sp>
         <p:nvSpPr>
-          <p:cNvPr id="21" name="TextBox 20"/>
-          <p:cNvSpPr txBox="1"/>
-          <p:nvPr/>
-        </p:nvSpPr>
-        <p:spPr>
-          <a:xfrm>
-            <a:off x="9240012" y="4661153"/>
-            <a:ext cx="3934206" cy="326898"/>
+          <p:cNvPr id="22" name="TextBox 21"/>
+          <p:cNvSpPr txBox="1"/>
+          <p:nvPr/>
+        </p:nvSpPr>
+        <p:spPr>
+          <a:xfrm>
+            <a:off x="4540613" y="4661153"/>
+            <a:ext cx="3781167" cy="326898"/>
           </a:xfrm>
           <a:prstGeom prst="rect">
             <a:avLst/>
@@ -2636,21 +2675,21 @@
                 </a:solidFill>
                 <a:latin typeface="Arial"/>
               </a:rPr>
-              <a:t>1,544,946</a:t>
-            </a:r>
-          </a:p>
-        </p:txBody>
-      </p:sp>
-      <p:sp>
-        <p:nvSpPr>
-          <p:cNvPr id="22" name="rule"/>
+              <a:t>2 · 1,344 tok (fits)</a:t>
+            </a:r>
+          </a:p>
+        </p:txBody>
+      </p:sp>
+      <p:sp>
+        <p:nvSpPr>
+          <p:cNvPr id="23" name="rule"/>
           <p:cNvSpPr/>
           <p:nvPr/>
         </p:nvSpPr>
         <p:spPr>
           <a:xfrm>
-            <a:off x="13366242" y="4423409"/>
-            <a:ext cx="3934206" cy="10972"/>
+            <a:off x="8513805" y="4423409"/>
+            <a:ext cx="2800864" cy="10972"/>
           </a:xfrm>
           <a:prstGeom prst="rect">
             <a:avLst/>
@@ -2687,14 +2726,14 @@
       </p:sp>
       <p:sp>
         <p:nvSpPr>
-          <p:cNvPr id="23" name="TextBox 22"/>
-          <p:cNvSpPr txBox="1"/>
-          <p:nvPr/>
-        </p:nvSpPr>
-        <p:spPr>
-          <a:xfrm>
-            <a:off x="13366242" y="4661153"/>
-            <a:ext cx="3934206" cy="326898"/>
+          <p:cNvPr id="24" name="TextBox 23"/>
+          <p:cNvSpPr txBox="1"/>
+          <p:nvPr/>
+        </p:nvSpPr>
+        <p:spPr>
+          <a:xfrm>
+            <a:off x="8513805" y="4661153"/>
+            <a:ext cx="2800864" cy="326898"/>
           </a:xfrm>
           <a:prstGeom prst="rect">
             <a:avLst/>
@@ -2719,21 +2758,21 @@
                 </a:solidFill>
                 <a:latin typeface="Arial"/>
               </a:rPr>
-              <a:t>1,675,327</a:t>
-            </a:r>
-          </a:p>
-        </p:txBody>
-      </p:sp>
-      <p:sp>
-        <p:nvSpPr>
-          <p:cNvPr id="24" name="rule"/>
+              <a:t>—</a:t>
+            </a:r>
+          </a:p>
+        </p:txBody>
+      </p:sp>
+      <p:sp>
+        <p:nvSpPr>
+          <p:cNvPr id="25" name="rule"/>
           <p:cNvSpPr/>
           <p:nvPr/>
         </p:nvSpPr>
         <p:spPr>
           <a:xfrm>
-            <a:off x="987552" y="5221223"/>
-            <a:ext cx="3934206" cy="10972"/>
+            <a:off x="11506694" y="4423409"/>
+            <a:ext cx="2800864" cy="10972"/>
           </a:xfrm>
           <a:prstGeom prst="rect">
             <a:avLst/>
@@ -2770,14 +2809,14 @@
       </p:sp>
       <p:sp>
         <p:nvSpPr>
-          <p:cNvPr id="25" name="TextBox 24"/>
-          <p:cNvSpPr txBox="1"/>
-          <p:nvPr/>
-        </p:nvSpPr>
-        <p:spPr>
-          <a:xfrm>
-            <a:off x="987552" y="5458967"/>
-            <a:ext cx="3934206" cy="402336"/>
+          <p:cNvPr id="26" name="TextBox 25"/>
+          <p:cNvSpPr txBox="1"/>
+          <p:nvPr/>
+        </p:nvSpPr>
+        <p:spPr>
+          <a:xfrm>
+            <a:off x="11506694" y="4661153"/>
+            <a:ext cx="2800864" cy="326898"/>
           </a:xfrm>
           <a:prstGeom prst="rect">
             <a:avLst/>
@@ -2796,27 +2835,27 @@
               </a:lnSpc>
             </a:pPr>
             <a:r>
-              <a:rPr sz="2400" b="0" u="none" i="0">
-                <a:solidFill>
-                  <a:srgbClr val="18181B"/>
-                </a:solidFill>
-                <a:latin typeface="Arial"/>
-              </a:rPr>
-              <a:t>task E=64 · R=4</a:t>
-            </a:r>
-          </a:p>
-        </p:txBody>
-      </p:sp>
-      <p:sp>
-        <p:nvSpPr>
-          <p:cNvPr id="26" name="rule"/>
+              <a:rPr sz="1950" b="0" u="none" i="0">
+                <a:solidFill>
+                  <a:srgbClr val="52525B"/>
+                </a:solidFill>
+                <a:latin typeface="Arial"/>
+              </a:rPr>
+              <a:t>1,544,946</a:t>
+            </a:r>
+          </a:p>
+        </p:txBody>
+      </p:sp>
+      <p:sp>
+        <p:nvSpPr>
+          <p:cNvPr id="27" name="rule"/>
           <p:cNvSpPr/>
           <p:nvPr/>
         </p:nvSpPr>
         <p:spPr>
           <a:xfrm>
-            <a:off x="5113782" y="5221223"/>
-            <a:ext cx="3934206" cy="10972"/>
+            <a:off x="14499583" y="4423409"/>
+            <a:ext cx="2800864" cy="10972"/>
           </a:xfrm>
           <a:prstGeom prst="rect">
             <a:avLst/>
@@ -2853,14 +2892,14 @@
       </p:sp>
       <p:sp>
         <p:nvSpPr>
-          <p:cNvPr id="27" name="TextBox 26"/>
-          <p:cNvSpPr txBox="1"/>
-          <p:nvPr/>
-        </p:nvSpPr>
-        <p:spPr>
-          <a:xfrm>
-            <a:off x="5113782" y="5458967"/>
-            <a:ext cx="3934206" cy="326898"/>
+          <p:cNvPr id="28" name="TextBox 27"/>
+          <p:cNvSpPr txBox="1"/>
+          <p:nvPr/>
+        </p:nvSpPr>
+        <p:spPr>
+          <a:xfrm>
+            <a:off x="14499583" y="4661153"/>
+            <a:ext cx="2800864" cy="326898"/>
           </a:xfrm>
           <a:prstGeom prst="rect">
             <a:avLst/>
@@ -2885,21 +2924,21 @@
                 </a:solidFill>
                 <a:latin typeface="Arial"/>
               </a:rPr>
-              <a:t>—</a:t>
-            </a:r>
-          </a:p>
-        </p:txBody>
-      </p:sp>
-      <p:sp>
-        <p:nvSpPr>
-          <p:cNvPr id="28" name="rule"/>
+              <a:t>1,675,327</a:t>
+            </a:r>
+          </a:p>
+        </p:txBody>
+      </p:sp>
+      <p:sp>
+        <p:nvSpPr>
+          <p:cNvPr id="29" name="rule"/>
           <p:cNvSpPr/>
           <p:nvPr/>
         </p:nvSpPr>
         <p:spPr>
           <a:xfrm>
-            <a:off x="9240012" y="5221223"/>
-            <a:ext cx="3934206" cy="10972"/>
+            <a:off x="987552" y="5221223"/>
+            <a:ext cx="3361037" cy="10972"/>
           </a:xfrm>
           <a:prstGeom prst="rect">
             <a:avLst/>
@@ -2936,14 +2975,14 @@
       </p:sp>
       <p:sp>
         <p:nvSpPr>
-          <p:cNvPr id="29" name="TextBox 28"/>
-          <p:cNvSpPr txBox="1"/>
-          <p:nvPr/>
-        </p:nvSpPr>
-        <p:spPr>
-          <a:xfrm>
-            <a:off x="9240012" y="5458967"/>
-            <a:ext cx="3934206" cy="326898"/>
+          <p:cNvPr id="30" name="TextBox 29"/>
+          <p:cNvSpPr txBox="1"/>
+          <p:nvPr/>
+        </p:nvSpPr>
+        <p:spPr>
+          <a:xfrm>
+            <a:off x="987552" y="5458967"/>
+            <a:ext cx="3361037" cy="402336"/>
           </a:xfrm>
           <a:prstGeom prst="rect">
             <a:avLst/>
@@ -2962,27 +3001,27 @@
               </a:lnSpc>
             </a:pPr>
             <a:r>
-              <a:rPr sz="1950" b="0" u="none" i="0">
-                <a:solidFill>
-                  <a:srgbClr val="52525B"/>
-                </a:solidFill>
-                <a:latin typeface="Arial"/>
-              </a:rPr>
-              <a:t>1,550,855</a:t>
-            </a:r>
-          </a:p>
-        </p:txBody>
-      </p:sp>
-      <p:sp>
-        <p:nvSpPr>
-          <p:cNvPr id="30" name="rule"/>
+              <a:rPr sz="2400" b="0" u="none" i="0">
+                <a:solidFill>
+                  <a:srgbClr val="18181B"/>
+                </a:solidFill>
+                <a:latin typeface="Arial"/>
+              </a:rPr>
+              <a:t>task · 1,024 tok</a:t>
+            </a:r>
+          </a:p>
+        </p:txBody>
+      </p:sp>
+      <p:sp>
+        <p:nvSpPr>
+          <p:cNvPr id="31" name="rule"/>
           <p:cNvSpPr/>
           <p:nvPr/>
         </p:nvSpPr>
         <p:spPr>
           <a:xfrm>
-            <a:off x="13366242" y="5221223"/>
-            <a:ext cx="3934206" cy="10972"/>
+            <a:off x="4540613" y="5221223"/>
+            <a:ext cx="3781167" cy="10972"/>
           </a:xfrm>
           <a:prstGeom prst="rect">
             <a:avLst/>
@@ -3019,14 +3058,14 @@
       </p:sp>
       <p:sp>
         <p:nvSpPr>
-          <p:cNvPr id="31" name="TextBox 30"/>
-          <p:cNvSpPr txBox="1"/>
-          <p:nvPr/>
-        </p:nvSpPr>
-        <p:spPr>
-          <a:xfrm>
-            <a:off x="13366242" y="5458967"/>
-            <a:ext cx="3934206" cy="326898"/>
+          <p:cNvPr id="32" name="TextBox 31"/>
+          <p:cNvSpPr txBox="1"/>
+          <p:nvPr/>
+        </p:nvSpPr>
+        <p:spPr>
+          <a:xfrm>
+            <a:off x="4540613" y="5458967"/>
+            <a:ext cx="3781167" cy="326898"/>
           </a:xfrm>
           <a:prstGeom prst="rect">
             <a:avLst/>
@@ -3051,21 +3090,21 @@
                 </a:solidFill>
                 <a:latin typeface="Arial"/>
               </a:rPr>
-              <a:t>1,812,526</a:t>
-            </a:r>
-          </a:p>
-        </p:txBody>
-      </p:sp>
-      <p:sp>
-        <p:nvSpPr>
-          <p:cNvPr id="32" name="rule"/>
+              <a:t>4 · 2,688 tok (fits)</a:t>
+            </a:r>
+          </a:p>
+        </p:txBody>
+      </p:sp>
+      <p:sp>
+        <p:nvSpPr>
+          <p:cNvPr id="33" name="rule"/>
           <p:cNvSpPr/>
           <p:nvPr/>
         </p:nvSpPr>
         <p:spPr>
           <a:xfrm>
-            <a:off x="987552" y="6019037"/>
-            <a:ext cx="3934206" cy="10972"/>
+            <a:off x="8513805" y="5221223"/>
+            <a:ext cx="2800864" cy="10972"/>
           </a:xfrm>
           <a:prstGeom prst="rect">
             <a:avLst/>
@@ -3102,14 +3141,14 @@
       </p:sp>
       <p:sp>
         <p:nvSpPr>
-          <p:cNvPr id="33" name="TextBox 32"/>
-          <p:cNvSpPr txBox="1"/>
-          <p:nvPr/>
-        </p:nvSpPr>
-        <p:spPr>
-          <a:xfrm>
-            <a:off x="987552" y="6256781"/>
-            <a:ext cx="3934206" cy="402336"/>
+          <p:cNvPr id="34" name="TextBox 33"/>
+          <p:cNvSpPr txBox="1"/>
+          <p:nvPr/>
+        </p:nvSpPr>
+        <p:spPr>
+          <a:xfrm>
+            <a:off x="8513805" y="5458967"/>
+            <a:ext cx="2800864" cy="326898"/>
           </a:xfrm>
           <a:prstGeom prst="rect">
             <a:avLst/>
@@ -3128,27 +3167,27 @@
               </a:lnSpc>
             </a:pPr>
             <a:r>
-              <a:rPr sz="2400" b="0" u="none" i="0">
-                <a:solidFill>
-                  <a:srgbClr val="18181B"/>
-                </a:solidFill>
-                <a:latin typeface="Arial"/>
-              </a:rPr>
-              <a:t>dsd E=512 · R=1</a:t>
-            </a:r>
-          </a:p>
-        </p:txBody>
-      </p:sp>
-      <p:sp>
-        <p:nvSpPr>
-          <p:cNvPr id="34" name="rule"/>
+              <a:rPr sz="1950" b="0" u="none" i="0">
+                <a:solidFill>
+                  <a:srgbClr val="52525B"/>
+                </a:solidFill>
+                <a:latin typeface="Arial"/>
+              </a:rPr>
+              <a:t>—</a:t>
+            </a:r>
+          </a:p>
+        </p:txBody>
+      </p:sp>
+      <p:sp>
+        <p:nvSpPr>
+          <p:cNvPr id="35" name="rule"/>
           <p:cNvSpPr/>
           <p:nvPr/>
         </p:nvSpPr>
         <p:spPr>
           <a:xfrm>
-            <a:off x="5113782" y="6019037"/>
-            <a:ext cx="3934206" cy="10972"/>
+            <a:off x="11506694" y="5221223"/>
+            <a:ext cx="2800864" cy="10972"/>
           </a:xfrm>
           <a:prstGeom prst="rect">
             <a:avLst/>
@@ -3185,14 +3224,14 @@
       </p:sp>
       <p:sp>
         <p:nvSpPr>
-          <p:cNvPr id="35" name="TextBox 34"/>
-          <p:cNvSpPr txBox="1"/>
-          <p:nvPr/>
-        </p:nvSpPr>
-        <p:spPr>
-          <a:xfrm>
-            <a:off x="5113782" y="6256781"/>
-            <a:ext cx="3934206" cy="326898"/>
+          <p:cNvPr id="36" name="TextBox 35"/>
+          <p:cNvSpPr txBox="1"/>
+          <p:nvPr/>
+        </p:nvSpPr>
+        <p:spPr>
+          <a:xfrm>
+            <a:off x="11506694" y="5458967"/>
+            <a:ext cx="2800864" cy="326898"/>
           </a:xfrm>
           <a:prstGeom prst="rect">
             <a:avLst/>
@@ -3217,21 +3256,21 @@
                 </a:solidFill>
                 <a:latin typeface="Arial"/>
               </a:rPr>
-              <a:t>7,350,234</a:t>
-            </a:r>
-          </a:p>
-        </p:txBody>
-      </p:sp>
-      <p:sp>
-        <p:nvSpPr>
-          <p:cNvPr id="36" name="rule"/>
+              <a:t>1,550,855</a:t>
+            </a:r>
+          </a:p>
+        </p:txBody>
+      </p:sp>
+      <p:sp>
+        <p:nvSpPr>
+          <p:cNvPr id="37" name="rule"/>
           <p:cNvSpPr/>
           <p:nvPr/>
         </p:nvSpPr>
         <p:spPr>
           <a:xfrm>
-            <a:off x="9240012" y="6019037"/>
-            <a:ext cx="3934206" cy="10972"/>
+            <a:off x="14499583" y="5221223"/>
+            <a:ext cx="2800864" cy="10972"/>
           </a:xfrm>
           <a:prstGeom prst="rect">
             <a:avLst/>
@@ -3268,14 +3307,14 @@
       </p:sp>
       <p:sp>
         <p:nvSpPr>
-          <p:cNvPr id="37" name="TextBox 36"/>
-          <p:cNvSpPr txBox="1"/>
-          <p:nvPr/>
-        </p:nvSpPr>
-        <p:spPr>
-          <a:xfrm>
-            <a:off x="9240012" y="6256781"/>
-            <a:ext cx="3934206" cy="326898"/>
+          <p:cNvPr id="38" name="TextBox 37"/>
+          <p:cNvSpPr txBox="1"/>
+          <p:nvPr/>
+        </p:nvSpPr>
+        <p:spPr>
+          <a:xfrm>
+            <a:off x="14499583" y="5458967"/>
+            <a:ext cx="2800864" cy="326898"/>
           </a:xfrm>
           <a:prstGeom prst="rect">
             <a:avLst/>
@@ -3300,21 +3339,21 @@
                 </a:solidFill>
                 <a:latin typeface="Arial"/>
               </a:rPr>
-              <a:t>8,542,434</a:t>
-            </a:r>
-          </a:p>
-        </p:txBody>
-      </p:sp>
-      <p:sp>
-        <p:nvSpPr>
-          <p:cNvPr id="38" name="rule"/>
+              <a:t>1,812,526</a:t>
+            </a:r>
+          </a:p>
+        </p:txBody>
+      </p:sp>
+      <p:sp>
+        <p:nvSpPr>
+          <p:cNvPr id="39" name="rule"/>
           <p:cNvSpPr/>
           <p:nvPr/>
         </p:nvSpPr>
         <p:spPr>
           <a:xfrm>
-            <a:off x="13366242" y="6019037"/>
-            <a:ext cx="3934206" cy="10972"/>
+            <a:off x="987552" y="6019037"/>
+            <a:ext cx="3361037" cy="10972"/>
           </a:xfrm>
           <a:prstGeom prst="rect">
             <a:avLst/>
@@ -3351,14 +3390,14 @@
       </p:sp>
       <p:sp>
         <p:nvSpPr>
-          <p:cNvPr id="39" name="TextBox 38"/>
-          <p:cNvSpPr txBox="1"/>
-          <p:nvPr/>
-        </p:nvSpPr>
-        <p:spPr>
-          <a:xfrm>
-            <a:off x="13366242" y="6256781"/>
-            <a:ext cx="3934206" cy="326898"/>
+          <p:cNvPr id="40" name="TextBox 39"/>
+          <p:cNvSpPr txBox="1"/>
+          <p:nvPr/>
+        </p:nvSpPr>
+        <p:spPr>
+          <a:xfrm>
+            <a:off x="987552" y="6256781"/>
+            <a:ext cx="3361037" cy="402336"/>
           </a:xfrm>
           <a:prstGeom prst="rect">
             <a:avLst/>
@@ -3377,27 +3416,27 @@
               </a:lnSpc>
             </a:pPr>
             <a:r>
-              <a:rPr sz="1950" b="0" u="none" i="0">
-                <a:solidFill>
-                  <a:srgbClr val="52525B"/>
-                </a:solidFill>
-                <a:latin typeface="Arial"/>
-              </a:rPr>
-              <a:t>7,482,812</a:t>
-            </a:r>
-          </a:p>
-        </p:txBody>
-      </p:sp>
-      <p:sp>
-        <p:nvSpPr>
-          <p:cNvPr id="40" name="rule"/>
+              <a:rPr sz="2400" b="0" u="none" i="0">
+                <a:solidFill>
+                  <a:srgbClr val="18181B"/>
+                </a:solidFill>
+                <a:latin typeface="Arial"/>
+              </a:rPr>
+              <a:t>DSD · 8,192 tok</a:t>
+            </a:r>
+          </a:p>
+        </p:txBody>
+      </p:sp>
+      <p:sp>
+        <p:nvSpPr>
+          <p:cNvPr id="41" name="rule"/>
           <p:cNvSpPr/>
           <p:nvPr/>
         </p:nvSpPr>
         <p:spPr>
           <a:xfrm>
-            <a:off x="987552" y="6816851"/>
-            <a:ext cx="3934206" cy="10972"/>
+            <a:off x="4540613" y="6019037"/>
+            <a:ext cx="3781167" cy="10972"/>
           </a:xfrm>
           <a:prstGeom prst="rect">
             <a:avLst/>
@@ -3434,14 +3473,14 @@
       </p:sp>
       <p:sp>
         <p:nvSpPr>
-          <p:cNvPr id="41" name="TextBox 40"/>
-          <p:cNvSpPr txBox="1"/>
-          <p:nvPr/>
-        </p:nvSpPr>
-        <p:spPr>
-          <a:xfrm>
-            <a:off x="987552" y="7054595"/>
-            <a:ext cx="3934206" cy="402336"/>
+          <p:cNvPr id="42" name="TextBox 41"/>
+          <p:cNvSpPr txBox="1"/>
+          <p:nvPr/>
+        </p:nvSpPr>
+        <p:spPr>
+          <a:xfrm>
+            <a:off x="4540613" y="6256781"/>
+            <a:ext cx="3781167" cy="326898"/>
           </a:xfrm>
           <a:prstGeom prst="rect">
             <a:avLst/>
@@ -3460,27 +3499,27 @@
               </a:lnSpc>
             </a:pPr>
             <a:r>
-              <a:rPr sz="2400" b="0" u="none" i="0">
-                <a:solidFill>
-                  <a:srgbClr val="18181B"/>
-                </a:solidFill>
-                <a:latin typeface="Arial"/>
-              </a:rPr>
-              <a:t>dsd E=512 · R=2</a:t>
-            </a:r>
-          </a:p>
-        </p:txBody>
-      </p:sp>
-      <p:sp>
-        <p:nvSpPr>
-          <p:cNvPr id="42" name="rule"/>
+              <a:rPr sz="1950" b="0" u="none" i="0">
+                <a:solidFill>
+                  <a:srgbClr val="52525B"/>
+                </a:solidFill>
+                <a:latin typeface="Arial"/>
+              </a:rPr>
+              <a:t>1 · 672 tok (under)</a:t>
+            </a:r>
+          </a:p>
+        </p:txBody>
+      </p:sp>
+      <p:sp>
+        <p:nvSpPr>
+          <p:cNvPr id="43" name="rule"/>
           <p:cNvSpPr/>
           <p:nvPr/>
         </p:nvSpPr>
         <p:spPr>
           <a:xfrm>
-            <a:off x="5113782" y="6816851"/>
-            <a:ext cx="3934206" cy="10972"/>
+            <a:off x="8513805" y="6019037"/>
+            <a:ext cx="2800864" cy="10972"/>
           </a:xfrm>
           <a:prstGeom prst="rect">
             <a:avLst/>
@@ -3517,14 +3556,14 @@
       </p:sp>
       <p:sp>
         <p:nvSpPr>
-          <p:cNvPr id="43" name="TextBox 42"/>
-          <p:cNvSpPr txBox="1"/>
-          <p:nvPr/>
-        </p:nvSpPr>
-        <p:spPr>
-          <a:xfrm>
-            <a:off x="5113782" y="7054595"/>
-            <a:ext cx="3934206" cy="326898"/>
+          <p:cNvPr id="44" name="TextBox 43"/>
+          <p:cNvSpPr txBox="1"/>
+          <p:nvPr/>
+        </p:nvSpPr>
+        <p:spPr>
+          <a:xfrm>
+            <a:off x="8513805" y="6256781"/>
+            <a:ext cx="2800864" cy="326898"/>
           </a:xfrm>
           <a:prstGeom prst="rect">
             <a:avLst/>
@@ -3549,21 +3588,21 @@
                 </a:solidFill>
                 <a:latin typeface="Arial"/>
               </a:rPr>
-              <a:t>—</a:t>
-            </a:r>
-          </a:p>
-        </p:txBody>
-      </p:sp>
-      <p:sp>
-        <p:nvSpPr>
-          <p:cNvPr id="44" name="rule"/>
+              <a:t>7,350,234</a:t>
+            </a:r>
+          </a:p>
+        </p:txBody>
+      </p:sp>
+      <p:sp>
+        <p:nvSpPr>
+          <p:cNvPr id="45" name="rule"/>
           <p:cNvSpPr/>
           <p:nvPr/>
         </p:nvSpPr>
         <p:spPr>
           <a:xfrm>
-            <a:off x="9240012" y="6816851"/>
-            <a:ext cx="3934206" cy="10972"/>
+            <a:off x="11506694" y="6019037"/>
+            <a:ext cx="2800864" cy="10972"/>
           </a:xfrm>
           <a:prstGeom prst="rect">
             <a:avLst/>
@@ -3600,14 +3639,14 @@
       </p:sp>
       <p:sp>
         <p:nvSpPr>
-          <p:cNvPr id="45" name="TextBox 44"/>
-          <p:cNvSpPr txBox="1"/>
-          <p:nvPr/>
-        </p:nvSpPr>
-        <p:spPr>
-          <a:xfrm>
-            <a:off x="9240012" y="7054595"/>
-            <a:ext cx="3934206" cy="326898"/>
+          <p:cNvPr id="46" name="TextBox 45"/>
+          <p:cNvSpPr txBox="1"/>
+          <p:nvPr/>
+        </p:nvSpPr>
+        <p:spPr>
+          <a:xfrm>
+            <a:off x="11506694" y="6256781"/>
+            <a:ext cx="2800864" cy="326898"/>
           </a:xfrm>
           <a:prstGeom prst="rect">
             <a:avLst/>
@@ -3632,21 +3671,21 @@
                 </a:solidFill>
                 <a:latin typeface="Arial"/>
               </a:rPr>
-              <a:t>8,619,349</a:t>
-            </a:r>
-          </a:p>
-        </p:txBody>
-      </p:sp>
-      <p:sp>
-        <p:nvSpPr>
-          <p:cNvPr id="46" name="rule"/>
+              <a:t>8,542,434</a:t>
+            </a:r>
+          </a:p>
+        </p:txBody>
+      </p:sp>
+      <p:sp>
+        <p:nvSpPr>
+          <p:cNvPr id="47" name="rule"/>
           <p:cNvSpPr/>
           <p:nvPr/>
         </p:nvSpPr>
         <p:spPr>
           <a:xfrm>
-            <a:off x="13366242" y="6816851"/>
-            <a:ext cx="3934206" cy="10972"/>
+            <a:off x="14499583" y="6019037"/>
+            <a:ext cx="2800864" cy="10972"/>
           </a:xfrm>
           <a:prstGeom prst="rect">
             <a:avLst/>
@@ -3683,14 +3722,14 @@
       </p:sp>
       <p:sp>
         <p:nvSpPr>
-          <p:cNvPr id="47" name="TextBox 46"/>
-          <p:cNvSpPr txBox="1"/>
-          <p:nvPr/>
-        </p:nvSpPr>
-        <p:spPr>
-          <a:xfrm>
-            <a:off x="13366242" y="7054595"/>
-            <a:ext cx="3934206" cy="326898"/>
+          <p:cNvPr id="48" name="TextBox 47"/>
+          <p:cNvSpPr txBox="1"/>
+          <p:nvPr/>
+        </p:nvSpPr>
+        <p:spPr>
+          <a:xfrm>
+            <a:off x="14499583" y="6256781"/>
+            <a:ext cx="2800864" cy="326898"/>
           </a:xfrm>
           <a:prstGeom prst="rect">
             <a:avLst/>
@@ -3715,21 +3754,21 @@
                 </a:solidFill>
                 <a:latin typeface="Arial"/>
               </a:rPr>
-              <a:t>10,669,498</a:t>
-            </a:r>
-          </a:p>
-        </p:txBody>
-      </p:sp>
-      <p:sp>
-        <p:nvSpPr>
-          <p:cNvPr id="48" name="rule"/>
+              <a:t>7,482,812</a:t>
+            </a:r>
+          </a:p>
+        </p:txBody>
+      </p:sp>
+      <p:sp>
+        <p:nvSpPr>
+          <p:cNvPr id="49" name="rule"/>
           <p:cNvSpPr/>
           <p:nvPr/>
         </p:nvSpPr>
         <p:spPr>
           <a:xfrm>
-            <a:off x="987552" y="7614665"/>
-            <a:ext cx="3934206" cy="10972"/>
+            <a:off x="987552" y="6816851"/>
+            <a:ext cx="3361037" cy="10972"/>
           </a:xfrm>
           <a:prstGeom prst="rect">
             <a:avLst/>
@@ -3766,14 +3805,14 @@
       </p:sp>
       <p:sp>
         <p:nvSpPr>
-          <p:cNvPr id="49" name="TextBox 48"/>
-          <p:cNvSpPr txBox="1"/>
-          <p:nvPr/>
-        </p:nvSpPr>
-        <p:spPr>
-          <a:xfrm>
-            <a:off x="987552" y="7852409"/>
-            <a:ext cx="3934206" cy="402336"/>
+          <p:cNvPr id="50" name="TextBox 49"/>
+          <p:cNvSpPr txBox="1"/>
+          <p:nvPr/>
+        </p:nvSpPr>
+        <p:spPr>
+          <a:xfrm>
+            <a:off x="987552" y="7054595"/>
+            <a:ext cx="3361037" cy="402336"/>
           </a:xfrm>
           <a:prstGeom prst="rect">
             <a:avLst/>
@@ -3798,21 +3837,21 @@
                 </a:solidFill>
                 <a:latin typeface="Arial"/>
               </a:rPr>
-              <a:t>dsd E=512 · R=4</a:t>
-            </a:r>
-          </a:p>
-        </p:txBody>
-      </p:sp>
-      <p:sp>
-        <p:nvSpPr>
-          <p:cNvPr id="50" name="rule"/>
+              <a:t>DSD · 8,192 tok</a:t>
+            </a:r>
+          </a:p>
+        </p:txBody>
+      </p:sp>
+      <p:sp>
+        <p:nvSpPr>
+          <p:cNvPr id="51" name="rule"/>
           <p:cNvSpPr/>
           <p:nvPr/>
         </p:nvSpPr>
         <p:spPr>
           <a:xfrm>
-            <a:off x="5113782" y="7614665"/>
-            <a:ext cx="3934206" cy="10972"/>
+            <a:off x="4540613" y="6816851"/>
+            <a:ext cx="3781167" cy="10972"/>
           </a:xfrm>
           <a:prstGeom prst="rect">
             <a:avLst/>
@@ -3849,14 +3888,14 @@
       </p:sp>
       <p:sp>
         <p:nvSpPr>
-          <p:cNvPr id="51" name="TextBox 50"/>
-          <p:cNvSpPr txBox="1"/>
-          <p:nvPr/>
-        </p:nvSpPr>
-        <p:spPr>
-          <a:xfrm>
-            <a:off x="5113782" y="7852409"/>
-            <a:ext cx="3934206" cy="326898"/>
+          <p:cNvPr id="52" name="TextBox 51"/>
+          <p:cNvSpPr txBox="1"/>
+          <p:nvPr/>
+        </p:nvSpPr>
+        <p:spPr>
+          <a:xfrm>
+            <a:off x="4540613" y="7054595"/>
+            <a:ext cx="3781167" cy="326898"/>
           </a:xfrm>
           <a:prstGeom prst="rect">
             <a:avLst/>
@@ -3881,21 +3920,21 @@
                 </a:solidFill>
                 <a:latin typeface="Arial"/>
               </a:rPr>
-              <a:t>—</a:t>
-            </a:r>
-          </a:p>
-        </p:txBody>
-      </p:sp>
-      <p:sp>
-        <p:nvSpPr>
-          <p:cNvPr id="52" name="rule"/>
+              <a:t>2 · 1,344 tok (under)</a:t>
+            </a:r>
+          </a:p>
+        </p:txBody>
+      </p:sp>
+      <p:sp>
+        <p:nvSpPr>
+          <p:cNvPr id="53" name="rule"/>
           <p:cNvSpPr/>
           <p:nvPr/>
         </p:nvSpPr>
         <p:spPr>
           <a:xfrm>
-            <a:off x="9240012" y="7614665"/>
-            <a:ext cx="3934206" cy="10972"/>
+            <a:off x="8513805" y="6816851"/>
+            <a:ext cx="2800864" cy="10972"/>
           </a:xfrm>
           <a:prstGeom prst="rect">
             <a:avLst/>
@@ -3932,14 +3971,14 @@
       </p:sp>
       <p:sp>
         <p:nvSpPr>
-          <p:cNvPr id="53" name="TextBox 52"/>
-          <p:cNvSpPr txBox="1"/>
-          <p:nvPr/>
-        </p:nvSpPr>
-        <p:spPr>
-          <a:xfrm>
-            <a:off x="9240012" y="7852409"/>
-            <a:ext cx="3934206" cy="326898"/>
+          <p:cNvPr id="54" name="TextBox 53"/>
+          <p:cNvSpPr txBox="1"/>
+          <p:nvPr/>
+        </p:nvSpPr>
+        <p:spPr>
+          <a:xfrm>
+            <a:off x="8513805" y="7054595"/>
+            <a:ext cx="2800864" cy="326898"/>
           </a:xfrm>
           <a:prstGeom prst="rect">
             <a:avLst/>
@@ -3964,21 +4003,21 @@
                 </a:solidFill>
                 <a:latin typeface="Arial"/>
               </a:rPr>
-              <a:t>8,675,026</a:t>
-            </a:r>
-          </a:p>
-        </p:txBody>
-      </p:sp>
-      <p:sp>
-        <p:nvSpPr>
-          <p:cNvPr id="54" name="rule"/>
+              <a:t>—</a:t>
+            </a:r>
+          </a:p>
+        </p:txBody>
+      </p:sp>
+      <p:sp>
+        <p:nvSpPr>
+          <p:cNvPr id="55" name="rule"/>
           <p:cNvSpPr/>
           <p:nvPr/>
         </p:nvSpPr>
         <p:spPr>
           <a:xfrm>
-            <a:off x="13366242" y="7614665"/>
-            <a:ext cx="3934206" cy="10972"/>
+            <a:off x="11506694" y="6816851"/>
+            <a:ext cx="2800864" cy="10972"/>
           </a:xfrm>
           <a:prstGeom prst="rect">
             <a:avLst/>
@@ -4015,14 +4054,512 @@
       </p:sp>
       <p:sp>
         <p:nvSpPr>
-          <p:cNvPr id="55" name="TextBox 54"/>
-          <p:cNvSpPr txBox="1"/>
-          <p:nvPr/>
-        </p:nvSpPr>
-        <p:spPr>
-          <a:xfrm>
-            <a:off x="13366242" y="7852409"/>
-            <a:ext cx="3934206" cy="326898"/>
+          <p:cNvPr id="56" name="TextBox 55"/>
+          <p:cNvSpPr txBox="1"/>
+          <p:nvPr/>
+        </p:nvSpPr>
+        <p:spPr>
+          <a:xfrm>
+            <a:off x="11506694" y="7054595"/>
+            <a:ext cx="2800864" cy="326898"/>
+          </a:xfrm>
+          <a:prstGeom prst="rect">
+            <a:avLst/>
+          </a:prstGeom>
+          <a:noFill/>
+        </p:spPr>
+        <p:txBody>
+          <a:bodyPr wrap="square" lIns="0" rIns="0" tIns="0" bIns="0" anchor="t">
+            <a:spAutoFit/>
+          </a:bodyPr>
+          <a:lstStyle/>
+          <a:p>
+            <a:pPr algn="l">
+              <a:lnSpc>
+                <a:spcPct val="132000"/>
+              </a:lnSpc>
+            </a:pPr>
+            <a:r>
+              <a:rPr sz="1950" b="0" u="none" i="0">
+                <a:solidFill>
+                  <a:srgbClr val="52525B"/>
+                </a:solidFill>
+                <a:latin typeface="Arial"/>
+              </a:rPr>
+              <a:t>8,619,349</a:t>
+            </a:r>
+          </a:p>
+        </p:txBody>
+      </p:sp>
+      <p:sp>
+        <p:nvSpPr>
+          <p:cNvPr id="57" name="rule"/>
+          <p:cNvSpPr/>
+          <p:nvPr/>
+        </p:nvSpPr>
+        <p:spPr>
+          <a:xfrm>
+            <a:off x="14499583" y="6816851"/>
+            <a:ext cx="2800864" cy="10972"/>
+          </a:xfrm>
+          <a:prstGeom prst="rect">
+            <a:avLst/>
+          </a:prstGeom>
+          <a:solidFill>
+            <a:srgbClr val="E4E4E7"/>
+          </a:solidFill>
+          <a:ln>
+            <a:noFill/>
+          </a:ln>
+          <a:effectLst/>
+        </p:spPr>
+        <p:style>
+          <a:lnRef idx="1">
+            <a:schemeClr val="accent1"/>
+          </a:lnRef>
+          <a:fillRef idx="3">
+            <a:schemeClr val="accent1"/>
+          </a:fillRef>
+          <a:effectRef idx="2">
+            <a:schemeClr val="accent1"/>
+          </a:effectRef>
+          <a:fontRef idx="minor">
+            <a:schemeClr val="lt1"/>
+          </a:fontRef>
+        </p:style>
+        <p:txBody>
+          <a:bodyPr rtlCol="0" anchor="ctr"/>
+          <a:lstStyle/>
+          <a:p>
+            <a:pPr algn="ctr"/>
+          </a:p>
+        </p:txBody>
+      </p:sp>
+      <p:sp>
+        <p:nvSpPr>
+          <p:cNvPr id="58" name="TextBox 57"/>
+          <p:cNvSpPr txBox="1"/>
+          <p:nvPr/>
+        </p:nvSpPr>
+        <p:spPr>
+          <a:xfrm>
+            <a:off x="14499583" y="7054595"/>
+            <a:ext cx="2800864" cy="326898"/>
+          </a:xfrm>
+          <a:prstGeom prst="rect">
+            <a:avLst/>
+          </a:prstGeom>
+          <a:noFill/>
+        </p:spPr>
+        <p:txBody>
+          <a:bodyPr wrap="square" lIns="0" rIns="0" tIns="0" bIns="0" anchor="t">
+            <a:spAutoFit/>
+          </a:bodyPr>
+          <a:lstStyle/>
+          <a:p>
+            <a:pPr algn="l">
+              <a:lnSpc>
+                <a:spcPct val="132000"/>
+              </a:lnSpc>
+            </a:pPr>
+            <a:r>
+              <a:rPr sz="1950" b="0" u="none" i="0">
+                <a:solidFill>
+                  <a:srgbClr val="52525B"/>
+                </a:solidFill>
+                <a:latin typeface="Arial"/>
+              </a:rPr>
+              <a:t>10,669,498</a:t>
+            </a:r>
+          </a:p>
+        </p:txBody>
+      </p:sp>
+      <p:sp>
+        <p:nvSpPr>
+          <p:cNvPr id="59" name="rule"/>
+          <p:cNvSpPr/>
+          <p:nvPr/>
+        </p:nvSpPr>
+        <p:spPr>
+          <a:xfrm>
+            <a:off x="987552" y="7614665"/>
+            <a:ext cx="3361037" cy="10972"/>
+          </a:xfrm>
+          <a:prstGeom prst="rect">
+            <a:avLst/>
+          </a:prstGeom>
+          <a:solidFill>
+            <a:srgbClr val="E4E4E7"/>
+          </a:solidFill>
+          <a:ln>
+            <a:noFill/>
+          </a:ln>
+          <a:effectLst/>
+        </p:spPr>
+        <p:style>
+          <a:lnRef idx="1">
+            <a:schemeClr val="accent1"/>
+          </a:lnRef>
+          <a:fillRef idx="3">
+            <a:schemeClr val="accent1"/>
+          </a:fillRef>
+          <a:effectRef idx="2">
+            <a:schemeClr val="accent1"/>
+          </a:effectRef>
+          <a:fontRef idx="minor">
+            <a:schemeClr val="lt1"/>
+          </a:fontRef>
+        </p:style>
+        <p:txBody>
+          <a:bodyPr rtlCol="0" anchor="ctr"/>
+          <a:lstStyle/>
+          <a:p>
+            <a:pPr algn="ctr"/>
+          </a:p>
+        </p:txBody>
+      </p:sp>
+      <p:sp>
+        <p:nvSpPr>
+          <p:cNvPr id="60" name="TextBox 59"/>
+          <p:cNvSpPr txBox="1"/>
+          <p:nvPr/>
+        </p:nvSpPr>
+        <p:spPr>
+          <a:xfrm>
+            <a:off x="987552" y="7852409"/>
+            <a:ext cx="3361037" cy="402336"/>
+          </a:xfrm>
+          <a:prstGeom prst="rect">
+            <a:avLst/>
+          </a:prstGeom>
+          <a:noFill/>
+        </p:spPr>
+        <p:txBody>
+          <a:bodyPr wrap="square" lIns="0" rIns="0" tIns="0" bIns="0" anchor="t">
+            <a:spAutoFit/>
+          </a:bodyPr>
+          <a:lstStyle/>
+          <a:p>
+            <a:pPr algn="l">
+              <a:lnSpc>
+                <a:spcPct val="132000"/>
+              </a:lnSpc>
+            </a:pPr>
+            <a:r>
+              <a:rPr sz="2400" b="0" u="none" i="0">
+                <a:solidFill>
+                  <a:srgbClr val="18181B"/>
+                </a:solidFill>
+                <a:latin typeface="Arial"/>
+              </a:rPr>
+              <a:t>DSD · 8,192 tok</a:t>
+            </a:r>
+          </a:p>
+        </p:txBody>
+      </p:sp>
+      <p:sp>
+        <p:nvSpPr>
+          <p:cNvPr id="61" name="rule"/>
+          <p:cNvSpPr/>
+          <p:nvPr/>
+        </p:nvSpPr>
+        <p:spPr>
+          <a:xfrm>
+            <a:off x="4540613" y="7614665"/>
+            <a:ext cx="3781167" cy="10972"/>
+          </a:xfrm>
+          <a:prstGeom prst="rect">
+            <a:avLst/>
+          </a:prstGeom>
+          <a:solidFill>
+            <a:srgbClr val="E4E4E7"/>
+          </a:solidFill>
+          <a:ln>
+            <a:noFill/>
+          </a:ln>
+          <a:effectLst/>
+        </p:spPr>
+        <p:style>
+          <a:lnRef idx="1">
+            <a:schemeClr val="accent1"/>
+          </a:lnRef>
+          <a:fillRef idx="3">
+            <a:schemeClr val="accent1"/>
+          </a:fillRef>
+          <a:effectRef idx="2">
+            <a:schemeClr val="accent1"/>
+          </a:effectRef>
+          <a:fontRef idx="minor">
+            <a:schemeClr val="lt1"/>
+          </a:fontRef>
+        </p:style>
+        <p:txBody>
+          <a:bodyPr rtlCol="0" anchor="ctr"/>
+          <a:lstStyle/>
+          <a:p>
+            <a:pPr algn="ctr"/>
+          </a:p>
+        </p:txBody>
+      </p:sp>
+      <p:sp>
+        <p:nvSpPr>
+          <p:cNvPr id="62" name="TextBox 61"/>
+          <p:cNvSpPr txBox="1"/>
+          <p:nvPr/>
+        </p:nvSpPr>
+        <p:spPr>
+          <a:xfrm>
+            <a:off x="4540613" y="7852409"/>
+            <a:ext cx="3781167" cy="326898"/>
+          </a:xfrm>
+          <a:prstGeom prst="rect">
+            <a:avLst/>
+          </a:prstGeom>
+          <a:noFill/>
+        </p:spPr>
+        <p:txBody>
+          <a:bodyPr wrap="square" lIns="0" rIns="0" tIns="0" bIns="0" anchor="t">
+            <a:spAutoFit/>
+          </a:bodyPr>
+          <a:lstStyle/>
+          <a:p>
+            <a:pPr algn="l">
+              <a:lnSpc>
+                <a:spcPct val="132000"/>
+              </a:lnSpc>
+            </a:pPr>
+            <a:r>
+              <a:rPr sz="1950" b="0" u="none" i="0">
+                <a:solidFill>
+                  <a:srgbClr val="52525B"/>
+                </a:solidFill>
+                <a:latin typeface="Arial"/>
+              </a:rPr>
+              <a:t>4 · 2,688 tok (under)</a:t>
+            </a:r>
+          </a:p>
+        </p:txBody>
+      </p:sp>
+      <p:sp>
+        <p:nvSpPr>
+          <p:cNvPr id="63" name="rule"/>
+          <p:cNvSpPr/>
+          <p:nvPr/>
+        </p:nvSpPr>
+        <p:spPr>
+          <a:xfrm>
+            <a:off x="8513805" y="7614665"/>
+            <a:ext cx="2800864" cy="10972"/>
+          </a:xfrm>
+          <a:prstGeom prst="rect">
+            <a:avLst/>
+          </a:prstGeom>
+          <a:solidFill>
+            <a:srgbClr val="E4E4E7"/>
+          </a:solidFill>
+          <a:ln>
+            <a:noFill/>
+          </a:ln>
+          <a:effectLst/>
+        </p:spPr>
+        <p:style>
+          <a:lnRef idx="1">
+            <a:schemeClr val="accent1"/>
+          </a:lnRef>
+          <a:fillRef idx="3">
+            <a:schemeClr val="accent1"/>
+          </a:fillRef>
+          <a:effectRef idx="2">
+            <a:schemeClr val="accent1"/>
+          </a:effectRef>
+          <a:fontRef idx="minor">
+            <a:schemeClr val="lt1"/>
+          </a:fontRef>
+        </p:style>
+        <p:txBody>
+          <a:bodyPr rtlCol="0" anchor="ctr"/>
+          <a:lstStyle/>
+          <a:p>
+            <a:pPr algn="ctr"/>
+          </a:p>
+        </p:txBody>
+      </p:sp>
+      <p:sp>
+        <p:nvSpPr>
+          <p:cNvPr id="64" name="TextBox 63"/>
+          <p:cNvSpPr txBox="1"/>
+          <p:nvPr/>
+        </p:nvSpPr>
+        <p:spPr>
+          <a:xfrm>
+            <a:off x="8513805" y="7852409"/>
+            <a:ext cx="2800864" cy="326898"/>
+          </a:xfrm>
+          <a:prstGeom prst="rect">
+            <a:avLst/>
+          </a:prstGeom>
+          <a:noFill/>
+        </p:spPr>
+        <p:txBody>
+          <a:bodyPr wrap="square" lIns="0" rIns="0" tIns="0" bIns="0" anchor="t">
+            <a:spAutoFit/>
+          </a:bodyPr>
+          <a:lstStyle/>
+          <a:p>
+            <a:pPr algn="l">
+              <a:lnSpc>
+                <a:spcPct val="132000"/>
+              </a:lnSpc>
+            </a:pPr>
+            <a:r>
+              <a:rPr sz="1950" b="0" u="none" i="0">
+                <a:solidFill>
+                  <a:srgbClr val="52525B"/>
+                </a:solidFill>
+                <a:latin typeface="Arial"/>
+              </a:rPr>
+              <a:t>—</a:t>
+            </a:r>
+          </a:p>
+        </p:txBody>
+      </p:sp>
+      <p:sp>
+        <p:nvSpPr>
+          <p:cNvPr id="65" name="rule"/>
+          <p:cNvSpPr/>
+          <p:nvPr/>
+        </p:nvSpPr>
+        <p:spPr>
+          <a:xfrm>
+            <a:off x="11506694" y="7614665"/>
+            <a:ext cx="2800864" cy="10972"/>
+          </a:xfrm>
+          <a:prstGeom prst="rect">
+            <a:avLst/>
+          </a:prstGeom>
+          <a:solidFill>
+            <a:srgbClr val="E4E4E7"/>
+          </a:solidFill>
+          <a:ln>
+            <a:noFill/>
+          </a:ln>
+          <a:effectLst/>
+        </p:spPr>
+        <p:style>
+          <a:lnRef idx="1">
+            <a:schemeClr val="accent1"/>
+          </a:lnRef>
+          <a:fillRef idx="3">
+            <a:schemeClr val="accent1"/>
+          </a:fillRef>
+          <a:effectRef idx="2">
+            <a:schemeClr val="accent1"/>
+          </a:effectRef>
+          <a:fontRef idx="minor">
+            <a:schemeClr val="lt1"/>
+          </a:fontRef>
+        </p:style>
+        <p:txBody>
+          <a:bodyPr rtlCol="0" anchor="ctr"/>
+          <a:lstStyle/>
+          <a:p>
+            <a:pPr algn="ctr"/>
+          </a:p>
+        </p:txBody>
+      </p:sp>
+      <p:sp>
+        <p:nvSpPr>
+          <p:cNvPr id="66" name="TextBox 65"/>
+          <p:cNvSpPr txBox="1"/>
+          <p:nvPr/>
+        </p:nvSpPr>
+        <p:spPr>
+          <a:xfrm>
+            <a:off x="11506694" y="7852409"/>
+            <a:ext cx="2800864" cy="326898"/>
+          </a:xfrm>
+          <a:prstGeom prst="rect">
+            <a:avLst/>
+          </a:prstGeom>
+          <a:noFill/>
+        </p:spPr>
+        <p:txBody>
+          <a:bodyPr wrap="square" lIns="0" rIns="0" tIns="0" bIns="0" anchor="t">
+            <a:spAutoFit/>
+          </a:bodyPr>
+          <a:lstStyle/>
+          <a:p>
+            <a:pPr algn="l">
+              <a:lnSpc>
+                <a:spcPct val="132000"/>
+              </a:lnSpc>
+            </a:pPr>
+            <a:r>
+              <a:rPr sz="1950" b="0" u="none" i="0">
+                <a:solidFill>
+                  <a:srgbClr val="52525B"/>
+                </a:solidFill>
+                <a:latin typeface="Arial"/>
+              </a:rPr>
+              <a:t>8,675,026</a:t>
+            </a:r>
+          </a:p>
+        </p:txBody>
+      </p:sp>
+      <p:sp>
+        <p:nvSpPr>
+          <p:cNvPr id="67" name="rule"/>
+          <p:cNvSpPr/>
+          <p:nvPr/>
+        </p:nvSpPr>
+        <p:spPr>
+          <a:xfrm>
+            <a:off x="14499583" y="7614665"/>
+            <a:ext cx="2800864" cy="10972"/>
+          </a:xfrm>
+          <a:prstGeom prst="rect">
+            <a:avLst/>
+          </a:prstGeom>
+          <a:solidFill>
+            <a:srgbClr val="E4E4E7"/>
+          </a:solidFill>
+          <a:ln>
+            <a:noFill/>
+          </a:ln>
+          <a:effectLst/>
+        </p:spPr>
+        <p:style>
+          <a:lnRef idx="1">
+            <a:schemeClr val="accent1"/>
+          </a:lnRef>
+          <a:fillRef idx="3">
+            <a:schemeClr val="accent1"/>
+          </a:fillRef>
+          <a:effectRef idx="2">
+            <a:schemeClr val="accent1"/>
+          </a:effectRef>
+          <a:fontRef idx="minor">
+            <a:schemeClr val="lt1"/>
+          </a:fontRef>
+        </p:style>
+        <p:txBody>
+          <a:bodyPr rtlCol="0" anchor="ctr"/>
+          <a:lstStyle/>
+          <a:p>
+            <a:pPr algn="ctr"/>
+          </a:p>
+        </p:txBody>
+      </p:sp>
+      <p:sp>
+        <p:nvSpPr>
+          <p:cNvPr id="68" name="TextBox 67"/>
+          <p:cNvSpPr txBox="1"/>
+          <p:nvPr/>
+        </p:nvSpPr>
+        <p:spPr>
+          <a:xfrm>
+            <a:off x="14499583" y="7852409"/>
+            <a:ext cx="2800864" cy="326898"/>
           </a:xfrm>
           <a:prstGeom prst="rect">
             <a:avLst/>

--- a/projects/WaferEngine-staging/meetings/2026-08-24.pptx
+++ b/projects/WaferEngine-staging/meetings/2026-08-24.pptx
@@ -16,6 +16,10 @@
     <p:sldId id="261" r:id="rId12"/>
     <p:sldId id="262" r:id="rId13"/>
     <p:sldId id="263" r:id="rId14"/>
+    <p:sldId id="264" r:id="rId6"/>
+    <p:sldId id="265" r:id="rId5"/>
+    <p:sldId id="266" r:id="rId4"/>
+    <p:sldId id="267" r:id="rId3"/>
   </p:sldIdLst>
   <p:sldSz cx="18288000" cy="10287000"/>
   <p:notesSz cx="10287000" cy="18288000"/>
@@ -290,6 +294,144 @@
 </p:notes>
 </file>
 
+<file path=ppt/notesSlides/notesSlide10.xml><?xml version="1.0" encoding="utf-8"?>
+<p:notes xmlns:a="http://schemas.openxmlformats.org/drawingml/2006/main" xmlns:p="http://schemas.openxmlformats.org/presentationml/2006/main" xmlns:r="http://schemas.openxmlformats.org/officeDocument/2006/relationships">
+  <p:cSld>
+    <p:spTree>
+      <p:nvGrpSpPr>
+        <p:cNvPr id="1" name=""/>
+        <p:cNvGrpSpPr/>
+        <p:nvPr/>
+      </p:nvGrpSpPr>
+      <p:grpSpPr>
+        <a:xfrm>
+          <a:off x="0" y="0"/>
+          <a:ext cx="0" cy="0"/>
+          <a:chOff x="0" y="0"/>
+          <a:chExt cx="0" cy="0"/>
+        </a:xfrm>
+      </p:grpSpPr>
+      <p:sp>
+        <p:nvSpPr>
+          <p:cNvPr id="2" name="Notes Placeholder"/>
+          <p:cNvSpPr>
+            <a:spLocks noGrp="1"/>
+          </p:cNvSpPr>
+          <p:nvPr>
+            <p:ph type="body" idx="1"/>
+          </p:nvPr>
+        </p:nvSpPr>
+        <p:spPr/>
+        <p:txBody>
+          <a:bodyPr/>
+          <a:lstStyle/>
+          <a:p>
+            <a:r>
+              <a:t>Exact implemented skip surface: vecmat_computation_f32 avoids Q/K/V/O/up/gate/down GEMV maps; score_matvec_mult skips Q·K cache traversal; output_matvec_mult skips P·V cache aggregation; process_kv preserves resident KV. c1_zero_inactive_x establishes deterministic dummy state and is not saved work. RMSNorm, QK norm, RoPE, softmax, SiLU/SwiGLU, residuals, whole-buffer zero/cast, every collective, route reconfiguration, X/Z transport and head/tail remain active at fixed extent. One global token position remains; this is C1, not C2 independent progress.</a:t>
+            </a:r>
+          </a:p>
+        </p:txBody>
+      </p:sp>
+    </p:spTree>
+  </p:cSld>
+  <p:clrMapOvr>
+    <a:masterClrMapping/>
+  </p:clrMapOvr>
+</p:notes>
+</file>
+
+<file path=ppt/notesSlides/notesSlide11.xml><?xml version="1.0" encoding="utf-8"?>
+<p:notes xmlns:a="http://schemas.openxmlformats.org/drawingml/2006/main" xmlns:p="http://schemas.openxmlformats.org/presentationml/2006/main" xmlns:r="http://schemas.openxmlformats.org/officeDocument/2006/relationships">
+  <p:cSld>
+    <p:spTree>
+      <p:nvGrpSpPr>
+        <p:cNvPr id="1" name=""/>
+        <p:cNvGrpSpPr/>
+        <p:nvPr/>
+      </p:nvGrpSpPr>
+      <p:grpSpPr>
+        <a:xfrm>
+          <a:off x="0" y="0"/>
+          <a:ext cx="0" cy="0"/>
+          <a:chOff x="0" y="0"/>
+          <a:chExt cx="0" cy="0"/>
+        </a:xfrm>
+      </p:grpSpPr>
+      <p:sp>
+        <p:nvSpPr>
+          <p:cNvPr id="2" name="Notes Placeholder"/>
+          <p:cNvSpPr>
+            <a:spLocks noGrp="1"/>
+          </p:cNvSpPr>
+          <p:nvPr>
+            <p:ph type="body" idx="1"/>
+          </p:nvPr>
+        </p:nvSpPr>
+        <p:spPr/>
+        <p:txBody>
+          <a:bodyPr/>
+          <a:lstStyle/>
+          <a:p>
+            <a:r>
+              <a:t>Construction-matched manual K0 is the only baseline used here. Mean speedups for K=256/512/768 are -0.0328%, -0.0924%, and -0.0297%; the response is non-monotonic and no break-even appears. A descriptive K=768 Welch sensitivity has an approximate +0.106% speedup upper edge, but serial case blocks make it non-universal. The automatic Experiment-A K0 is 12.2363% faster than this manual construction and must not be mixed into the ratio. Decision boundary: NO-GO for C1-M as a throughput mechanism at this point; operation reduction is real, end-to-end throughput/fairness/energy remain separate or unknown.</a:t>
+            </a:r>
+          </a:p>
+        </p:txBody>
+      </p:sp>
+    </p:spTree>
+  </p:cSld>
+  <p:clrMapOvr>
+    <a:masterClrMapping/>
+  </p:clrMapOvr>
+</p:notes>
+</file>
+
+<file path=ppt/notesSlides/notesSlide12.xml><?xml version="1.0" encoding="utf-8"?>
+<p:notes xmlns:a="http://schemas.openxmlformats.org/drawingml/2006/main" xmlns:p="http://schemas.openxmlformats.org/presentationml/2006/main" xmlns:r="http://schemas.openxmlformats.org/officeDocument/2006/relationships">
+  <p:cSld>
+    <p:spTree>
+      <p:nvGrpSpPr>
+        <p:cNvPr id="1" name=""/>
+        <p:cNvGrpSpPr/>
+        <p:nvPr/>
+      </p:nvGrpSpPr>
+      <p:grpSpPr>
+        <a:xfrm>
+          <a:off x="0" y="0"/>
+          <a:ext cx="0" cy="0"/>
+          <a:chOff x="0" y="0"/>
+          <a:chExt cx="0" cy="0"/>
+        </a:xfrm>
+      </p:grpSpPr>
+      <p:sp>
+        <p:nvSpPr>
+          <p:cNvPr id="2" name="Notes Placeholder"/>
+          <p:cNvSpPr>
+            <a:spLocks noGrp="1"/>
+          </p:cNvSpPr>
+          <p:nvPr>
+            <p:ph type="body" idx="1"/>
+          </p:nvPr>
+        </p:nvSpPr>
+        <p:spPr/>
+        <p:txBody>
+          <a:bodyPr/>
+          <a:lstStyle/>
+          <a:p>
+            <a:r>
+              <a:t>No recommendation is implied yet. Option A is one bounded profiling gate to explain the fixed floor. Option B targets the final mechanism in which a long-hit request can advance without waiting for another lane's missing prefix, but crosses into C2 and O1 continuous-batching scope. The realistic workload projection remains necessary before either path receives a serving-level gain.</a:t>
+            </a:r>
+          </a:p>
+        </p:txBody>
+      </p:sp>
+    </p:spTree>
+  </p:cSld>
+  <p:clrMapOvr>
+    <a:masterClrMapping/>
+  </p:clrMapOvr>
+</p:notes>
+</file>
+
 <file path=ppt/notesSlides/notesSlide2.xml><?xml version="1.0" encoding="utf-8"?>
 <p:notes xmlns:a="http://schemas.openxmlformats.org/drawingml/2006/main" xmlns:p="http://schemas.openxmlformats.org/presentationml/2006/main" xmlns:r="http://schemas.openxmlformats.org/officeDocument/2006/relationships">
   <p:cSld>
@@ -600,6 +742,52 @@
           <a:p>
             <a:r>
               <a:t>Tier reading: T0 in-PE resident (free, scarcest SRAM) / T1 on-chip strip (swap ~ L/692 token-equivalents as-built; capacity R x ~11K words per column, columns parallel) / T2 recompute (only for tiny or un-parked history) / T2 DRAM (capacity overflow; shared edge IO, host in the loop). Caveats stated: delta floor is L_new=256 at 77.4 us/token - smaller L_new shrinks it; throughput view still wants the storage-DSD rung; concurrent-decode interference and round-gap fit are the remaining unmeasured items. Open design: a hybrid (v4 router transit + v5 static compute column) would dominate both at ~1.6 baseline + ~1.1 tax.</a:t>
+            </a:r>
+          </a:p>
+        </p:txBody>
+      </p:sp>
+    </p:spTree>
+  </p:cSld>
+  <p:clrMapOvr>
+    <a:masterClrMapping/>
+  </p:clrMapOvr>
+</p:notes>
+</file>
+
+<file path=ppt/notesSlides/notesSlide9.xml><?xml version="1.0" encoding="utf-8"?>
+<p:notes xmlns:a="http://schemas.openxmlformats.org/drawingml/2006/main" xmlns:p="http://schemas.openxmlformats.org/presentationml/2006/main" xmlns:r="http://schemas.openxmlformats.org/officeDocument/2006/relationships">
+  <p:cSld>
+    <p:spTree>
+      <p:nvGrpSpPr>
+        <p:cNvPr id="1" name=""/>
+        <p:cNvGrpSpPr/>
+        <p:nvPr/>
+      </p:nvGrpSpPr>
+      <p:grpSpPr>
+        <a:xfrm>
+          <a:off x="0" y="0"/>
+          <a:ext cx="0" cy="0"/>
+          <a:chOff x="0" y="0"/>
+          <a:chExt cx="0" cy="0"/>
+        </a:xfrm>
+      </p:grpSpPr>
+      <p:sp>
+        <p:nvSpPr>
+          <p:cNvPr id="2" name="Notes Placeholder"/>
+          <p:cNvSpPr>
+            <a:spLocks noGrp="1"/>
+          </p:cNvSpPr>
+          <p:nvPr>
+            <p:ph type="body" idx="1"/>
+          </p:nvPr>
+        </p:nvSpPr>
+        <p:spPr/>
+        <p:txBody>
+          <a:bodyPr/>
+          <a:lstStyle/>
+          <a:p>
+            <a:r>
+              <a:t>This directly follows the Aug 11 ragged-execution limitation slide. Current common-start assignment is numerically correct; the open question was whether suppressing redundant lane work would shorten the lockstep batch critical path, or only reduce operation count and improve fairness/energy. Source figure: 2026-08-11 weekly collaborator deck, slide 7.</a:t>
             </a:r>
           </a:p>
         </p:txBody>
@@ -1498,6 +1686,1154 @@
 </p:sld>
 </file>
 
+<file path=ppt/slides/slide10.xml><?xml version="1.0" encoding="utf-8"?>
+<p:sld xmlns:a="http://schemas.openxmlformats.org/drawingml/2006/main" xmlns:p="http://schemas.openxmlformats.org/presentationml/2006/main" xmlns:r="http://schemas.openxmlformats.org/officeDocument/2006/relationships">
+  <p:cSld>
+    <p:spTree>
+      <p:nvGrpSpPr>
+        <p:cNvPr id="1" name=""/>
+        <p:cNvGrpSpPr/>
+        <p:nvPr/>
+      </p:nvGrpSpPr>
+      <p:grpSpPr/>
+      <p:sp>
+        <p:nvSpPr>
+          <p:cNvPr id="2" name="TextBox 1"/>
+          <p:cNvSpPr txBox="1"/>
+          <p:nvPr/>
+        </p:nvSpPr>
+        <p:spPr>
+          <a:xfrm>
+            <a:off x="987552" y="914400"/>
+            <a:ext cx="16312896" cy="301752"/>
+          </a:xfrm>
+          <a:prstGeom prst="rect">
+            <a:avLst/>
+          </a:prstGeom>
+          <a:noFill/>
+        </p:spPr>
+        <p:txBody>
+          <a:bodyPr wrap="square" lIns="0" rIns="0" tIns="0" bIns="0" anchor="t">
+            <a:spAutoFit/>
+          </a:bodyPr>
+          <a:lstStyle/>
+          <a:p>
+            <a:pPr algn="l">
+              <a:lnSpc>
+                <a:spcPct val="132000"/>
+              </a:lnSpc>
+            </a:pPr>
+            <a:r>
+              <a:rPr sz="1800" b="0" u="none" i="0" spc="150">
+                <a:solidFill>
+                  <a:srgbClr val="A1A1AA"/>
+                </a:solidFill>
+                <a:latin typeface="Arial"/>
+              </a:rPr>
+              <a:t>BENCHMARK-ONLY C1-M CHANGE</a:t>
+            </a:r>
+          </a:p>
+        </p:txBody>
+      </p:sp>
+      <p:sp>
+        <p:nvSpPr>
+          <p:cNvPr id="3" name="TextBox 2"/>
+          <p:cNvSpPr txBox="1"/>
+          <p:nvPr/>
+        </p:nvSpPr>
+        <p:spPr>
+          <a:xfrm>
+            <a:off x="987552" y="1371600"/>
+            <a:ext cx="16312896" cy="674369"/>
+          </a:xfrm>
+          <a:prstGeom prst="rect">
+            <a:avLst/>
+          </a:prstGeom>
+          <a:noFill/>
+        </p:spPr>
+        <p:txBody>
+          <a:bodyPr wrap="square" lIns="0" rIns="0" tIns="0" bIns="0" anchor="t">
+            <a:spAutoFit/>
+          </a:bodyPr>
+          <a:lstStyle/>
+          <a:p>
+            <a:pPr algn="l">
+              <a:lnSpc>
+                <a:spcPct val="118000"/>
+              </a:lnSpc>
+            </a:pPr>
+            <a:r>
+              <a:rPr sz="4500" b="0" u="none" i="0">
+                <a:solidFill>
+                  <a:srgbClr val="18181B"/>
+                </a:solidFill>
+                <a:latin typeface="Arial"/>
+              </a:rPr>
+              <a:t>We skipped lane-sliced compute; the fixed batch floor stayed</a:t>
+            </a:r>
+          </a:p>
+        </p:txBody>
+      </p:sp>
+      <p:pic>
+        <p:nvPicPr>
+          <p:cNvPr id="4" name="figure" descr="decode_step_c1_scope.png"/>
+          <p:cNvPicPr>
+            <a:picLocks noChangeAspect="1"/>
+          </p:cNvPicPr>
+          <p:nvPr/>
+        </p:nvPicPr>
+        <p:blipFill>
+          <a:blip r:embed="rId2"/>
+          <a:stretch>
+            <a:fillRect/>
+          </a:stretch>
+        </p:blipFill>
+        <p:spPr>
+          <a:xfrm>
+            <a:off x="4458208" y="2484881"/>
+            <a:ext cx="9371584" cy="5271516"/>
+          </a:xfrm>
+          <a:prstGeom prst="rect">
+            <a:avLst/>
+          </a:prstGeom>
+        </p:spPr>
+      </p:pic>
+      <p:sp>
+        <p:nvSpPr>
+          <p:cNvPr id="5" name="TextBox 4"/>
+          <p:cNvSpPr txBox="1"/>
+          <p:nvPr/>
+        </p:nvSpPr>
+        <p:spPr>
+          <a:xfrm>
+            <a:off x="987552" y="8030718"/>
+            <a:ext cx="16312896" cy="326898"/>
+          </a:xfrm>
+          <a:prstGeom prst="rect">
+            <a:avLst/>
+          </a:prstGeom>
+          <a:noFill/>
+        </p:spPr>
+        <p:txBody>
+          <a:bodyPr wrap="square" lIns="0" rIns="0" tIns="0" bIns="0" anchor="t">
+            <a:spAutoFit/>
+          </a:bodyPr>
+          <a:lstStyle/>
+          <a:p>
+            <a:pPr algn="l">
+              <a:lnSpc>
+                <a:spcPct val="132000"/>
+              </a:lnSpc>
+            </a:pPr>
+            <a:r>
+              <a:rPr sz="1950" b="0" u="none" i="0">
+                <a:solidFill>
+                  <a:srgbClr val="A1A1AA"/>
+                </a:solidFill>
+                <a:latin typeface="Arial"/>
+              </a:rPr>
+              <a:t>Green is predicated while step &lt; Rᵢ − min(R); yellow still executes for the inactive lane; grey remains full-bsz communication or whole-buffer work.</a:t>
+            </a:r>
+          </a:p>
+        </p:txBody>
+      </p:sp>
+    </p:spTree>
+  </p:cSld>
+  <p:clrMapOvr>
+    <a:masterClrMapping/>
+  </p:clrMapOvr>
+</p:sld>
+</file>
+
+<file path=ppt/slides/slide11.xml><?xml version="1.0" encoding="utf-8"?>
+<p:sld xmlns:a="http://schemas.openxmlformats.org/drawingml/2006/main" xmlns:p="http://schemas.openxmlformats.org/presentationml/2006/main" xmlns:r="http://schemas.openxmlformats.org/officeDocument/2006/relationships">
+  <p:cSld>
+    <p:spTree>
+      <p:nvGrpSpPr>
+        <p:cNvPr id="1" name=""/>
+        <p:cNvGrpSpPr/>
+        <p:nvPr/>
+      </p:nvGrpSpPr>
+      <p:grpSpPr/>
+      <p:sp>
+        <p:nvSpPr>
+          <p:cNvPr id="2" name="TextBox 1"/>
+          <p:cNvSpPr txBox="1"/>
+          <p:nvPr/>
+        </p:nvSpPr>
+        <p:spPr>
+          <a:xfrm>
+            <a:off x="987552" y="914400"/>
+            <a:ext cx="16312896" cy="301752"/>
+          </a:xfrm>
+          <a:prstGeom prst="rect">
+            <a:avLst/>
+          </a:prstGeom>
+          <a:noFill/>
+        </p:spPr>
+        <p:txBody>
+          <a:bodyPr wrap="square" lIns="0" rIns="0" tIns="0" bIns="0" anchor="t">
+            <a:spAutoFit/>
+          </a:bodyPr>
+          <a:lstStyle/>
+          <a:p>
+            <a:pPr algn="l">
+              <a:lnSpc>
+                <a:spcPct val="132000"/>
+              </a:lnSpc>
+            </a:pPr>
+            <a:r>
+              <a:rPr sz="1800" b="0" u="none" i="0" spc="150">
+                <a:solidFill>
+                  <a:srgbClr val="A1A1AA"/>
+                </a:solidFill>
+                <a:latin typeface="Arial"/>
+              </a:rPr>
+              <a:t>REAL CS-3 RESULT · 20/20 ACCEPTED</a:t>
+            </a:r>
+          </a:p>
+        </p:txBody>
+      </p:sp>
+      <p:sp>
+        <p:nvSpPr>
+          <p:cNvPr id="3" name="TextBox 2"/>
+          <p:cNvSpPr txBox="1"/>
+          <p:nvPr/>
+        </p:nvSpPr>
+        <p:spPr>
+          <a:xfrm>
+            <a:off x="987552" y="1371600"/>
+            <a:ext cx="16312896" cy="674369"/>
+          </a:xfrm>
+          <a:prstGeom prst="rect">
+            <a:avLst/>
+          </a:prstGeom>
+          <a:noFill/>
+        </p:spPr>
+        <p:txBody>
+          <a:bodyPr wrap="square" lIns="0" rIns="0" tIns="0" bIns="0" anchor="t">
+            <a:spAutoFit/>
+          </a:bodyPr>
+          <a:lstStyle/>
+          <a:p>
+            <a:pPr algn="l">
+              <a:lnSpc>
+                <a:spcPct val="118000"/>
+              </a:lnSpc>
+            </a:pPr>
+            <a:r>
+              <a:rPr sz="4500" b="0" u="none" i="0">
+                <a:solidFill>
+                  <a:srgbClr val="18181B"/>
+                </a:solidFill>
+                <a:latin typeface="Arial"/>
+              </a:rPr>
+              <a:t>37.49% less lane-step work produced no critical-path speedup</a:t>
+            </a:r>
+          </a:p>
+        </p:txBody>
+      </p:sp>
+      <p:pic>
+        <p:nvPicPr>
+          <p:cNvPr id="4" name="figure" descr="c1_result.png"/>
+          <p:cNvPicPr>
+            <a:picLocks noChangeAspect="1"/>
+          </p:cNvPicPr>
+          <p:nvPr/>
+        </p:nvPicPr>
+        <p:blipFill>
+          <a:blip r:embed="rId2"/>
+          <a:stretch>
+            <a:fillRect/>
+          </a:stretch>
+        </p:blipFill>
+        <p:spPr>
+          <a:xfrm>
+            <a:off x="4482115" y="2484882"/>
+            <a:ext cx="9323769" cy="5271516"/>
+          </a:xfrm>
+          <a:prstGeom prst="rect">
+            <a:avLst/>
+          </a:prstGeom>
+        </p:spPr>
+      </p:pic>
+      <p:sp>
+        <p:nvSpPr>
+          <p:cNvPr id="5" name="TextBox 4"/>
+          <p:cNvSpPr txBox="1"/>
+          <p:nvPr/>
+        </p:nvSpPr>
+        <p:spPr>
+          <a:xfrm>
+            <a:off x="987552" y="8030718"/>
+            <a:ext cx="16312896" cy="326898"/>
+          </a:xfrm>
+          <a:prstGeom prst="rect">
+            <a:avLst/>
+          </a:prstGeom>
+          <a:noFill/>
+        </p:spPr>
+        <p:txBody>
+          <a:bodyPr wrap="square" lIns="0" rIns="0" tIns="0" bIns="0" anchor="t">
+            <a:spAutoFit/>
+          </a:bodyPr>
+          <a:lstStyle/>
+          <a:p>
+            <a:pPr algn="l">
+              <a:lnSpc>
+                <a:spcPct val="132000"/>
+              </a:lnSpc>
+            </a:pPr>
+            <a:r>
+              <a:rPr sz="1950" b="0" u="none" i="0">
+                <a:solidFill>
+                  <a:srgbClr val="A1A1AA"/>
+                </a:solidFill>
+                <a:latin typeface="Arial"/>
+              </a:rPr>
+              <a:t>Full Qwen3-1.7B, bsz=2, S/N/F/G=256/1024/769/255, five repetitions per case, raw TSC cycles. At K=768, mean speedup is −0.0297%.</a:t>
+            </a:r>
+          </a:p>
+        </p:txBody>
+      </p:sp>
+    </p:spTree>
+  </p:cSld>
+  <p:clrMapOvr>
+    <a:masterClrMapping/>
+  </p:clrMapOvr>
+</p:sld>
+</file>
+
+<file path=ppt/slides/slide12.xml><?xml version="1.0" encoding="utf-8"?>
+<p:sld xmlns:a="http://schemas.openxmlformats.org/drawingml/2006/main" xmlns:p="http://schemas.openxmlformats.org/presentationml/2006/main" xmlns:r="http://schemas.openxmlformats.org/officeDocument/2006/relationships">
+  <p:cSld>
+    <p:spTree>
+      <p:nvGrpSpPr>
+        <p:cNvPr id="1" name=""/>
+        <p:cNvGrpSpPr/>
+        <p:nvPr/>
+      </p:nvGrpSpPr>
+      <p:grpSpPr/>
+      <p:sp>
+        <p:nvSpPr>
+          <p:cNvPr id="2" name="TextBox 1"/>
+          <p:cNvSpPr txBox="1"/>
+          <p:nvPr/>
+        </p:nvSpPr>
+        <p:spPr>
+          <a:xfrm>
+            <a:off x="987552" y="914400"/>
+            <a:ext cx="16312896" cy="301752"/>
+          </a:xfrm>
+          <a:prstGeom prst="rect">
+            <a:avLst/>
+          </a:prstGeom>
+          <a:noFill/>
+        </p:spPr>
+        <p:txBody>
+          <a:bodyPr wrap="square" lIns="0" rIns="0" tIns="0" bIns="0" anchor="t">
+            <a:spAutoFit/>
+          </a:bodyPr>
+          <a:lstStyle/>
+          <a:p>
+            <a:pPr algn="l">
+              <a:lnSpc>
+                <a:spcPct val="132000"/>
+              </a:lnSpc>
+            </a:pPr>
+            <a:r>
+              <a:rPr sz="1800" b="0" u="none" i="0" spc="150">
+                <a:solidFill>
+                  <a:srgbClr val="A1A1AA"/>
+                </a:solidFill>
+                <a:latin typeface="Arial"/>
+              </a:rPr>
+              <a:t>NEXT DECISION</a:t>
+            </a:r>
+          </a:p>
+        </p:txBody>
+      </p:sp>
+      <p:sp>
+        <p:nvSpPr>
+          <p:cNvPr id="3" name="TextBox 2"/>
+          <p:cNvSpPr txBox="1"/>
+          <p:nvPr/>
+        </p:nvSpPr>
+        <p:spPr>
+          <a:xfrm>
+            <a:off x="987552" y="1371600"/>
+            <a:ext cx="16312896" cy="674369"/>
+          </a:xfrm>
+          <a:prstGeom prst="rect">
+            <a:avLst/>
+          </a:prstGeom>
+          <a:noFill/>
+        </p:spPr>
+        <p:txBody>
+          <a:bodyPr wrap="square" lIns="0" rIns="0" tIns="0" bIns="0" anchor="t">
+            <a:spAutoFit/>
+          </a:bodyPr>
+          <a:lstStyle/>
+          <a:p>
+            <a:pPr algn="l">
+              <a:lnSpc>
+                <a:spcPct val="118000"/>
+              </a:lnSpc>
+            </a:pPr>
+            <a:r>
+              <a:rPr sz="4500" b="0" u="none" i="0">
+                <a:solidFill>
+                  <a:srgbClr val="18181B"/>
+                </a:solidFill>
+                <a:latin typeface="Arial"/>
+              </a:rPr>
+              <a:t>Pin the fixed floor—or move to independent lane progress</a:t>
+            </a:r>
+          </a:p>
+        </p:txBody>
+      </p:sp>
+      <p:sp>
+        <p:nvSpPr>
+          <p:cNvPr id="4" name="card"/>
+          <p:cNvSpPr/>
+          <p:nvPr/>
+        </p:nvSpPr>
+        <p:spPr>
+          <a:xfrm>
+            <a:off x="987552" y="2484882"/>
+            <a:ext cx="7424927" cy="4636007"/>
+          </a:xfrm>
+          <a:prstGeom prst="roundRect">
+            <a:avLst>
+              <a:gd name="adj" fmla="val 6195"/>
+            </a:avLst>
+          </a:prstGeom>
+          <a:solidFill>
+            <a:srgbClr val="FFFFFF"/>
+          </a:solidFill>
+          <a:ln w="12700">
+            <a:solidFill>
+              <a:srgbClr val="E4E4E7"/>
+            </a:solidFill>
+          </a:ln>
+          <a:effectLst/>
+        </p:spPr>
+        <p:style>
+          <a:lnRef idx="1">
+            <a:schemeClr val="accent1"/>
+          </a:lnRef>
+          <a:fillRef idx="3">
+            <a:schemeClr val="accent1"/>
+          </a:fillRef>
+          <a:effectRef idx="2">
+            <a:schemeClr val="accent1"/>
+          </a:effectRef>
+          <a:fontRef idx="minor">
+            <a:schemeClr val="lt1"/>
+          </a:fontRef>
+        </p:style>
+        <p:txBody>
+          <a:bodyPr rtlCol="0" anchor="ctr"/>
+          <a:lstStyle/>
+          <a:p>
+            <a:pPr algn="ctr"/>
+          </a:p>
+        </p:txBody>
+      </p:sp>
+      <p:sp>
+        <p:nvSpPr>
+          <p:cNvPr id="5" name="card"/>
+          <p:cNvSpPr/>
+          <p:nvPr/>
+        </p:nvSpPr>
+        <p:spPr>
+          <a:xfrm>
+            <a:off x="987552" y="2484882"/>
+            <a:ext cx="7424927" cy="1069848"/>
+          </a:xfrm>
+          <a:prstGeom prst="roundRect">
+            <a:avLst>
+              <a:gd name="adj" fmla="val 6195"/>
+            </a:avLst>
+          </a:prstGeom>
+          <a:solidFill>
+            <a:srgbClr val="F4F4F5"/>
+          </a:solidFill>
+          <a:ln>
+            <a:noFill/>
+          </a:ln>
+          <a:effectLst/>
+        </p:spPr>
+        <p:style>
+          <a:lnRef idx="1">
+            <a:schemeClr val="accent1"/>
+          </a:lnRef>
+          <a:fillRef idx="3">
+            <a:schemeClr val="accent1"/>
+          </a:fillRef>
+          <a:effectRef idx="2">
+            <a:schemeClr val="accent1"/>
+          </a:effectRef>
+          <a:fontRef idx="minor">
+            <a:schemeClr val="lt1"/>
+          </a:fontRef>
+        </p:style>
+        <p:txBody>
+          <a:bodyPr rtlCol="0" anchor="ctr"/>
+          <a:lstStyle/>
+          <a:p>
+            <a:pPr algn="ctr"/>
+          </a:p>
+        </p:txBody>
+      </p:sp>
+      <p:sp>
+        <p:nvSpPr>
+          <p:cNvPr id="6" name="TextBox 5"/>
+          <p:cNvSpPr txBox="1"/>
+          <p:nvPr/>
+        </p:nvSpPr>
+        <p:spPr>
+          <a:xfrm>
+            <a:off x="1380744" y="2768346"/>
+            <a:ext cx="6638543" cy="502920"/>
+          </a:xfrm>
+          <a:prstGeom prst="rect">
+            <a:avLst/>
+          </a:prstGeom>
+          <a:noFill/>
+        </p:spPr>
+        <p:txBody>
+          <a:bodyPr wrap="square" lIns="0" rIns="0" tIns="0" bIns="0" anchor="t">
+            <a:spAutoFit/>
+          </a:bodyPr>
+          <a:lstStyle/>
+          <a:p>
+            <a:pPr algn="l">
+              <a:lnSpc>
+                <a:spcPct val="132000"/>
+              </a:lnSpc>
+            </a:pPr>
+            <a:r>
+              <a:rPr sz="3000" b="1" u="none" i="0">
+                <a:solidFill>
+                  <a:srgbClr val="18181B"/>
+                </a:solidFill>
+                <a:latin typeface="Arial"/>
+              </a:rPr>
+              <a:t>A · Profile the C1 fixed floor</a:t>
+            </a:r>
+          </a:p>
+        </p:txBody>
+      </p:sp>
+      <p:sp>
+        <p:nvSpPr>
+          <p:cNvPr id="7" name="TextBox 6"/>
+          <p:cNvSpPr txBox="1"/>
+          <p:nvPr/>
+        </p:nvSpPr>
+        <p:spPr>
+          <a:xfrm>
+            <a:off x="1380744" y="3911346"/>
+            <a:ext cx="457200" cy="402336"/>
+          </a:xfrm>
+          <a:prstGeom prst="rect">
+            <a:avLst/>
+          </a:prstGeom>
+          <a:noFill/>
+        </p:spPr>
+        <p:txBody>
+          <a:bodyPr wrap="square" lIns="0" rIns="0" tIns="0" bIns="0" anchor="t">
+            <a:spAutoFit/>
+          </a:bodyPr>
+          <a:lstStyle/>
+          <a:p>
+            <a:pPr algn="l">
+              <a:lnSpc>
+                <a:spcPct val="132000"/>
+              </a:lnSpc>
+            </a:pPr>
+            <a:r>
+              <a:rPr sz="2400" b="0" u="none" i="0">
+                <a:solidFill>
+                  <a:srgbClr val="A1A1AA"/>
+                </a:solidFill>
+                <a:latin typeface="Arial"/>
+              </a:rPr>
+              <a:t>—</a:t>
+            </a:r>
+          </a:p>
+        </p:txBody>
+      </p:sp>
+      <p:sp>
+        <p:nvSpPr>
+          <p:cNvPr id="8" name="TextBox 7"/>
+          <p:cNvSpPr txBox="1"/>
+          <p:nvPr/>
+        </p:nvSpPr>
+        <p:spPr>
+          <a:xfrm>
+            <a:off x="1883664" y="3911346"/>
+            <a:ext cx="6099047" cy="804672"/>
+          </a:xfrm>
+          <a:prstGeom prst="rect">
+            <a:avLst/>
+          </a:prstGeom>
+          <a:noFill/>
+        </p:spPr>
+        <p:txBody>
+          <a:bodyPr wrap="square" lIns="0" rIns="0" tIns="0" bIns="0" anchor="t">
+            <a:spAutoFit/>
+          </a:bodyPr>
+          <a:lstStyle/>
+          <a:p>
+            <a:pPr algn="l">
+              <a:lnSpc>
+                <a:spcPct val="132000"/>
+              </a:lnSpc>
+            </a:pPr>
+            <a:r>
+              <a:rPr sz="2400" b="0" u="none" i="0">
+                <a:solidFill>
+                  <a:srgbClr val="18181B"/>
+                </a:solidFill>
+                <a:latin typeface="Arial"/>
+              </a:rPr>
+              <a:t>Time or ablate collectives, whole-buffer ops and transport by phase</a:t>
+            </a:r>
+          </a:p>
+        </p:txBody>
+      </p:sp>
+      <p:sp>
+        <p:nvSpPr>
+          <p:cNvPr id="9" name="TextBox 8"/>
+          <p:cNvSpPr txBox="1"/>
+          <p:nvPr/>
+        </p:nvSpPr>
+        <p:spPr>
+          <a:xfrm>
+            <a:off x="1380744" y="4935474"/>
+            <a:ext cx="457200" cy="402336"/>
+          </a:xfrm>
+          <a:prstGeom prst="rect">
+            <a:avLst/>
+          </a:prstGeom>
+          <a:noFill/>
+        </p:spPr>
+        <p:txBody>
+          <a:bodyPr wrap="square" lIns="0" rIns="0" tIns="0" bIns="0" anchor="t">
+            <a:spAutoFit/>
+          </a:bodyPr>
+          <a:lstStyle/>
+          <a:p>
+            <a:pPr algn="l">
+              <a:lnSpc>
+                <a:spcPct val="132000"/>
+              </a:lnSpc>
+            </a:pPr>
+            <a:r>
+              <a:rPr sz="2400" b="0" u="none" i="0">
+                <a:solidFill>
+                  <a:srgbClr val="A1A1AA"/>
+                </a:solidFill>
+                <a:latin typeface="Arial"/>
+              </a:rPr>
+              <a:t>—</a:t>
+            </a:r>
+          </a:p>
+        </p:txBody>
+      </p:sp>
+      <p:sp>
+        <p:nvSpPr>
+          <p:cNvPr id="10" name="TextBox 9"/>
+          <p:cNvSpPr txBox="1"/>
+          <p:nvPr/>
+        </p:nvSpPr>
+        <p:spPr>
+          <a:xfrm>
+            <a:off x="1883664" y="4935474"/>
+            <a:ext cx="6099047" cy="804672"/>
+          </a:xfrm>
+          <a:prstGeom prst="rect">
+            <a:avLst/>
+          </a:prstGeom>
+          <a:noFill/>
+        </p:spPr>
+        <p:txBody>
+          <a:bodyPr wrap="square" lIns="0" rIns="0" tIns="0" bIns="0" anchor="t">
+            <a:spAutoFit/>
+          </a:bodyPr>
+          <a:lstStyle/>
+          <a:p>
+            <a:pPr algn="l">
+              <a:lnSpc>
+                <a:spcPct val="132000"/>
+              </a:lnSpc>
+            </a:pPr>
+            <a:r>
+              <a:rPr sz="2400" b="0" u="none" i="0">
+                <a:solidFill>
+                  <a:srgbClr val="18181B"/>
+                </a:solidFill>
+                <a:latin typeface="Arial"/>
+              </a:rPr>
+              <a:t>Identify the single largest remaining critical-path item</a:t>
+            </a:r>
+          </a:p>
+        </p:txBody>
+      </p:sp>
+      <p:sp>
+        <p:nvSpPr>
+          <p:cNvPr id="11" name="TextBox 10"/>
+          <p:cNvSpPr txBox="1"/>
+          <p:nvPr/>
+        </p:nvSpPr>
+        <p:spPr>
+          <a:xfrm>
+            <a:off x="1380744" y="5959602"/>
+            <a:ext cx="457200" cy="402336"/>
+          </a:xfrm>
+          <a:prstGeom prst="rect">
+            <a:avLst/>
+          </a:prstGeom>
+          <a:noFill/>
+        </p:spPr>
+        <p:txBody>
+          <a:bodyPr wrap="square" lIns="0" rIns="0" tIns="0" bIns="0" anchor="t">
+            <a:spAutoFit/>
+          </a:bodyPr>
+          <a:lstStyle/>
+          <a:p>
+            <a:pPr algn="l">
+              <a:lnSpc>
+                <a:spcPct val="132000"/>
+              </a:lnSpc>
+            </a:pPr>
+            <a:r>
+              <a:rPr sz="2400" b="0" u="none" i="0">
+                <a:solidFill>
+                  <a:srgbClr val="A1A1AA"/>
+                </a:solidFill>
+                <a:latin typeface="Arial"/>
+              </a:rPr>
+              <a:t>—</a:t>
+            </a:r>
+          </a:p>
+        </p:txBody>
+      </p:sp>
+      <p:sp>
+        <p:nvSpPr>
+          <p:cNvPr id="12" name="TextBox 11"/>
+          <p:cNvSpPr txBox="1"/>
+          <p:nvPr/>
+        </p:nvSpPr>
+        <p:spPr>
+          <a:xfrm>
+            <a:off x="1883664" y="5959602"/>
+            <a:ext cx="6099047" cy="804672"/>
+          </a:xfrm>
+          <a:prstGeom prst="rect">
+            <a:avLst/>
+          </a:prstGeom>
+          <a:noFill/>
+        </p:spPr>
+        <p:txBody>
+          <a:bodyPr wrap="square" lIns="0" rIns="0" tIns="0" bIns="0" anchor="t">
+            <a:spAutoFit/>
+          </a:bodyPr>
+          <a:lstStyle/>
+          <a:p>
+            <a:pPr algn="l">
+              <a:lnSpc>
+                <a:spcPct val="132000"/>
+              </a:lnSpc>
+            </a:pPr>
+            <a:r>
+              <a:rPr sz="2400" b="0" u="none" i="0">
+                <a:solidFill>
+                  <a:srgbClr val="18181B"/>
+                </a:solidFill>
+                <a:latin typeface="Arial"/>
+              </a:rPr>
+              <a:t>Broaden masking only if that removable term can change the &lt;0.1% result</a:t>
+            </a:r>
+          </a:p>
+        </p:txBody>
+      </p:sp>
+      <p:sp>
+        <p:nvSpPr>
+          <p:cNvPr id="13" name="card"/>
+          <p:cNvSpPr/>
+          <p:nvPr/>
+        </p:nvSpPr>
+        <p:spPr>
+          <a:xfrm>
+            <a:off x="8796528" y="2484882"/>
+            <a:ext cx="7424927" cy="4636007"/>
+          </a:xfrm>
+          <a:prstGeom prst="roundRect">
+            <a:avLst>
+              <a:gd name="adj" fmla="val 6195"/>
+            </a:avLst>
+          </a:prstGeom>
+          <a:solidFill>
+            <a:srgbClr val="FFFFFF"/>
+          </a:solidFill>
+          <a:ln w="12700">
+            <a:solidFill>
+              <a:srgbClr val="E4E4E7"/>
+            </a:solidFill>
+          </a:ln>
+          <a:effectLst/>
+        </p:spPr>
+        <p:style>
+          <a:lnRef idx="1">
+            <a:schemeClr val="accent1"/>
+          </a:lnRef>
+          <a:fillRef idx="3">
+            <a:schemeClr val="accent1"/>
+          </a:fillRef>
+          <a:effectRef idx="2">
+            <a:schemeClr val="accent1"/>
+          </a:effectRef>
+          <a:fontRef idx="minor">
+            <a:schemeClr val="lt1"/>
+          </a:fontRef>
+        </p:style>
+        <p:txBody>
+          <a:bodyPr rtlCol="0" anchor="ctr"/>
+          <a:lstStyle/>
+          <a:p>
+            <a:pPr algn="ctr"/>
+          </a:p>
+        </p:txBody>
+      </p:sp>
+      <p:sp>
+        <p:nvSpPr>
+          <p:cNvPr id="14" name="card"/>
+          <p:cNvSpPr/>
+          <p:nvPr/>
+        </p:nvSpPr>
+        <p:spPr>
+          <a:xfrm>
+            <a:off x="8796528" y="2484882"/>
+            <a:ext cx="7424927" cy="1069848"/>
+          </a:xfrm>
+          <a:prstGeom prst="roundRect">
+            <a:avLst>
+              <a:gd name="adj" fmla="val 6195"/>
+            </a:avLst>
+          </a:prstGeom>
+          <a:solidFill>
+            <a:srgbClr val="F4F4F5"/>
+          </a:solidFill>
+          <a:ln>
+            <a:noFill/>
+          </a:ln>
+          <a:effectLst/>
+        </p:spPr>
+        <p:style>
+          <a:lnRef idx="1">
+            <a:schemeClr val="accent1"/>
+          </a:lnRef>
+          <a:fillRef idx="3">
+            <a:schemeClr val="accent1"/>
+          </a:fillRef>
+          <a:effectRef idx="2">
+            <a:schemeClr val="accent1"/>
+          </a:effectRef>
+          <a:fontRef idx="minor">
+            <a:schemeClr val="lt1"/>
+          </a:fontRef>
+        </p:style>
+        <p:txBody>
+          <a:bodyPr rtlCol="0" anchor="ctr"/>
+          <a:lstStyle/>
+          <a:p>
+            <a:pPr algn="ctr"/>
+          </a:p>
+        </p:txBody>
+      </p:sp>
+      <p:sp>
+        <p:nvSpPr>
+          <p:cNvPr id="15" name="TextBox 14"/>
+          <p:cNvSpPr txBox="1"/>
+          <p:nvPr/>
+        </p:nvSpPr>
+        <p:spPr>
+          <a:xfrm>
+            <a:off x="9189719" y="2768346"/>
+            <a:ext cx="6638543" cy="502920"/>
+          </a:xfrm>
+          <a:prstGeom prst="rect">
+            <a:avLst/>
+          </a:prstGeom>
+          <a:noFill/>
+        </p:spPr>
+        <p:txBody>
+          <a:bodyPr wrap="square" lIns="0" rIns="0" tIns="0" bIns="0" anchor="t">
+            <a:spAutoFit/>
+          </a:bodyPr>
+          <a:lstStyle/>
+          <a:p>
+            <a:pPr algn="l">
+              <a:lnSpc>
+                <a:spcPct val="132000"/>
+              </a:lnSpc>
+            </a:pPr>
+            <a:r>
+              <a:rPr sz="3000" b="1" u="none" i="0">
+                <a:solidFill>
+                  <a:srgbClr val="18181B"/>
+                </a:solidFill>
+                <a:latin typeface="Arial"/>
+              </a:rPr>
+              <a:t>B · Design C2 / continuous batching</a:t>
+            </a:r>
+          </a:p>
+        </p:txBody>
+      </p:sp>
+      <p:sp>
+        <p:nvSpPr>
+          <p:cNvPr id="16" name="TextBox 15"/>
+          <p:cNvSpPr txBox="1"/>
+          <p:nvPr/>
+        </p:nvSpPr>
+        <p:spPr>
+          <a:xfrm>
+            <a:off x="9189719" y="3911346"/>
+            <a:ext cx="457200" cy="402336"/>
+          </a:xfrm>
+          <a:prstGeom prst="rect">
+            <a:avLst/>
+          </a:prstGeom>
+          <a:noFill/>
+        </p:spPr>
+        <p:txBody>
+          <a:bodyPr wrap="square" lIns="0" rIns="0" tIns="0" bIns="0" anchor="t">
+            <a:spAutoFit/>
+          </a:bodyPr>
+          <a:lstStyle/>
+          <a:p>
+            <a:pPr algn="l">
+              <a:lnSpc>
+                <a:spcPct val="132000"/>
+              </a:lnSpc>
+            </a:pPr>
+            <a:r>
+              <a:rPr sz="2400" b="0" u="none" i="0">
+                <a:solidFill>
+                  <a:srgbClr val="A1A1AA"/>
+                </a:solidFill>
+                <a:latin typeface="Arial"/>
+              </a:rPr>
+              <a:t>—</a:t>
+            </a:r>
+          </a:p>
+        </p:txBody>
+      </p:sp>
+      <p:sp>
+        <p:nvSpPr>
+          <p:cNvPr id="17" name="TextBox 16"/>
+          <p:cNvSpPr txBox="1"/>
+          <p:nvPr/>
+        </p:nvSpPr>
+        <p:spPr>
+          <a:xfrm>
+            <a:off x="9692640" y="3911346"/>
+            <a:ext cx="6099047" cy="804672"/>
+          </a:xfrm>
+          <a:prstGeom prst="rect">
+            <a:avLst/>
+          </a:prstGeom>
+          <a:noFill/>
+        </p:spPr>
+        <p:txBody>
+          <a:bodyPr wrap="square" lIns="0" rIns="0" tIns="0" bIns="0" anchor="t">
+            <a:spAutoFit/>
+          </a:bodyPr>
+          <a:lstStyle/>
+          <a:p>
+            <a:pPr algn="l">
+              <a:lnSpc>
+                <a:spcPct val="132000"/>
+              </a:lnSpc>
+            </a:pPr>
+            <a:r>
+              <a:rPr sz="2400" b="0" u="none" i="0">
+                <a:solidFill>
+                  <a:srgbClr val="18181B"/>
+                </a:solidFill>
+                <a:latin typeface="Arial"/>
+              </a:rPr>
+              <a:t>Independent per-lane start, cursor and completion state</a:t>
+            </a:r>
+          </a:p>
+        </p:txBody>
+      </p:sp>
+      <p:sp>
+        <p:nvSpPr>
+          <p:cNvPr id="18" name="TextBox 17"/>
+          <p:cNvSpPr txBox="1"/>
+          <p:nvPr/>
+        </p:nvSpPr>
+        <p:spPr>
+          <a:xfrm>
+            <a:off x="9189719" y="4935474"/>
+            <a:ext cx="457200" cy="402336"/>
+          </a:xfrm>
+          <a:prstGeom prst="rect">
+            <a:avLst/>
+          </a:prstGeom>
+          <a:noFill/>
+        </p:spPr>
+        <p:txBody>
+          <a:bodyPr wrap="square" lIns="0" rIns="0" tIns="0" bIns="0" anchor="t">
+            <a:spAutoFit/>
+          </a:bodyPr>
+          <a:lstStyle/>
+          <a:p>
+            <a:pPr algn="l">
+              <a:lnSpc>
+                <a:spcPct val="132000"/>
+              </a:lnSpc>
+            </a:pPr>
+            <a:r>
+              <a:rPr sz="2400" b="0" u="none" i="0">
+                <a:solidFill>
+                  <a:srgbClr val="A1A1AA"/>
+                </a:solidFill>
+                <a:latin typeface="Arial"/>
+              </a:rPr>
+              <a:t>—</a:t>
+            </a:r>
+          </a:p>
+        </p:txBody>
+      </p:sp>
+      <p:sp>
+        <p:nvSpPr>
+          <p:cNvPr id="19" name="TextBox 18"/>
+          <p:cNvSpPr txBox="1"/>
+          <p:nvPr/>
+        </p:nvSpPr>
+        <p:spPr>
+          <a:xfrm>
+            <a:off x="9692640" y="4935474"/>
+            <a:ext cx="6099047" cy="804672"/>
+          </a:xfrm>
+          <a:prstGeom prst="rect">
+            <a:avLst/>
+          </a:prstGeom>
+          <a:noFill/>
+        </p:spPr>
+        <p:txBody>
+          <a:bodyPr wrap="square" lIns="0" rIns="0" tIns="0" bIns="0" anchor="t">
+            <a:spAutoFit/>
+          </a:bodyPr>
+          <a:lstStyle/>
+          <a:p>
+            <a:pPr algn="l">
+              <a:lnSpc>
+                <a:spcPct val="132000"/>
+              </a:lnSpc>
+            </a:pPr>
+            <a:r>
+              <a:rPr sz="2400" b="0" u="none" i="0">
+                <a:solidFill>
+                  <a:srgbClr val="18181B"/>
+                </a:solidFill>
+                <a:latin typeface="Arial"/>
+              </a:rPr>
+              <a:t>Price added SRAM, protocol, admission and scheduler complexity</a:t>
+            </a:r>
+          </a:p>
+        </p:txBody>
+      </p:sp>
+      <p:sp>
+        <p:nvSpPr>
+          <p:cNvPr id="20" name="TextBox 19"/>
+          <p:cNvSpPr txBox="1"/>
+          <p:nvPr/>
+        </p:nvSpPr>
+        <p:spPr>
+          <a:xfrm>
+            <a:off x="9189719" y="5959602"/>
+            <a:ext cx="457200" cy="402336"/>
+          </a:xfrm>
+          <a:prstGeom prst="rect">
+            <a:avLst/>
+          </a:prstGeom>
+          <a:noFill/>
+        </p:spPr>
+        <p:txBody>
+          <a:bodyPr wrap="square" lIns="0" rIns="0" tIns="0" bIns="0" anchor="t">
+            <a:spAutoFit/>
+          </a:bodyPr>
+          <a:lstStyle/>
+          <a:p>
+            <a:pPr algn="l">
+              <a:lnSpc>
+                <a:spcPct val="132000"/>
+              </a:lnSpc>
+            </a:pPr>
+            <a:r>
+              <a:rPr sz="2400" b="0" u="none" i="0">
+                <a:solidFill>
+                  <a:srgbClr val="A1A1AA"/>
+                </a:solidFill>
+                <a:latin typeface="Arial"/>
+              </a:rPr>
+              <a:t>—</a:t>
+            </a:r>
+          </a:p>
+        </p:txBody>
+      </p:sp>
+      <p:sp>
+        <p:nvSpPr>
+          <p:cNvPr id="21" name="TextBox 20"/>
+          <p:cNvSpPr txBox="1"/>
+          <p:nvPr/>
+        </p:nvSpPr>
+        <p:spPr>
+          <a:xfrm>
+            <a:off x="9692640" y="5959602"/>
+            <a:ext cx="6099047" cy="804672"/>
+          </a:xfrm>
+          <a:prstGeom prst="rect">
+            <a:avLst/>
+          </a:prstGeom>
+          <a:noFill/>
+        </p:spPr>
+        <p:txBody>
+          <a:bodyPr wrap="square" lIns="0" rIns="0" tIns="0" bIns="0" anchor="t">
+            <a:spAutoFit/>
+          </a:bodyPr>
+          <a:lstStyle/>
+          <a:p>
+            <a:pPr algn="l">
+              <a:lnSpc>
+                <a:spcPct val="132000"/>
+              </a:lnSpc>
+            </a:pPr>
+            <a:r>
+              <a:rPr sz="2400" b="0" u="none" i="0">
+                <a:solidFill>
+                  <a:srgbClr val="18181B"/>
+                </a:solidFill>
+                <a:latin typeface="Arial"/>
+              </a:rPr>
+              <a:t>Only credit gains that survive a serving-like schedule replay</a:t>
+            </a:r>
+          </a:p>
+        </p:txBody>
+      </p:sp>
+    </p:spTree>
+  </p:cSld>
+  <p:clrMapOvr>
+    <a:masterClrMapping/>
+  </p:clrMapOvr>
+</p:sld>
+</file>
+
 <file path=ppt/slides/slide2.xml><?xml version="1.0" encoding="utf-8"?>
 <p:sld xmlns:a="http://schemas.openxmlformats.org/drawingml/2006/main" xmlns:p="http://schemas.openxmlformats.org/presentationml/2006/main" xmlns:r="http://schemas.openxmlformats.org/officeDocument/2006/relationships">
   <p:cSld>
@@ -5221,6 +6557,165 @@
                 <a:latin typeface="Arial"/>
               </a:rPr>
               <a:t>Same axes and setting as the M2 boundary figure, plus measured tier C: on-chip strip reload adds only 0.06-2.0 ms (13.0 cyc/word), 46-170x below host ingress I(H), flattening resume onto the ~20 ms L_new delta floor. The old 744-token crossing becomes a fallback choice for un-parked history. Next lever for resume latency is the delta/restart path, not the transfer.</a:t>
+            </a:r>
+          </a:p>
+        </p:txBody>
+      </p:sp>
+    </p:spTree>
+  </p:cSld>
+  <p:clrMapOvr>
+    <a:masterClrMapping/>
+  </p:clrMapOvr>
+</p:sld>
+</file>
+
+<file path=ppt/slides/slide9.xml><?xml version="1.0" encoding="utf-8"?>
+<p:sld xmlns:a="http://schemas.openxmlformats.org/drawingml/2006/main" xmlns:p="http://schemas.openxmlformats.org/presentationml/2006/main" xmlns:r="http://schemas.openxmlformats.org/officeDocument/2006/relationships">
+  <p:cSld>
+    <p:spTree>
+      <p:nvGrpSpPr>
+        <p:cNvPr id="1" name=""/>
+        <p:cNvGrpSpPr/>
+        <p:nvPr/>
+      </p:nvGrpSpPr>
+      <p:grpSpPr/>
+      <p:sp>
+        <p:nvSpPr>
+          <p:cNvPr id="2" name="TextBox 1"/>
+          <p:cNvSpPr txBox="1"/>
+          <p:nvPr/>
+        </p:nvSpPr>
+        <p:spPr>
+          <a:xfrm>
+            <a:off x="987552" y="914400"/>
+            <a:ext cx="16312896" cy="301752"/>
+          </a:xfrm>
+          <a:prstGeom prst="rect">
+            <a:avLst/>
+          </a:prstGeom>
+          <a:noFill/>
+        </p:spPr>
+        <p:txBody>
+          <a:bodyPr wrap="square" lIns="0" rIns="0" tIns="0" bIns="0" anchor="t">
+            <a:spAutoFit/>
+          </a:bodyPr>
+          <a:lstStyle/>
+          <a:p>
+            <a:pPr algn="l">
+              <a:lnSpc>
+                <a:spcPct val="132000"/>
+              </a:lnSpc>
+            </a:pPr>
+            <a:r>
+              <a:rPr sz="1800" b="0" u="none" i="0" spc="150">
+                <a:solidFill>
+                  <a:srgbClr val="A1A1AA"/>
+                </a:solidFill>
+                <a:latin typeface="Arial"/>
+              </a:rPr>
+              <a:t>WHY THIS OPTIMIZATION · FOLLOW-UP TO AUG 11</a:t>
+            </a:r>
+          </a:p>
+        </p:txBody>
+      </p:sp>
+      <p:sp>
+        <p:nvSpPr>
+          <p:cNvPr id="3" name="TextBox 2"/>
+          <p:cNvSpPr txBox="1"/>
+          <p:nvPr/>
+        </p:nvSpPr>
+        <p:spPr>
+          <a:xfrm>
+            <a:off x="987552" y="1371600"/>
+            <a:ext cx="16312896" cy="674369"/>
+          </a:xfrm>
+          <a:prstGeom prst="rect">
+            <a:avLst/>
+          </a:prstGeom>
+          <a:noFill/>
+        </p:spPr>
+        <p:txBody>
+          <a:bodyPr wrap="square" lIns="0" rIns="0" tIns="0" bIns="0" anchor="t">
+            <a:spAutoFit/>
+          </a:bodyPr>
+          <a:lstStyle/>
+          <a:p>
+            <a:pPr algn="l">
+              <a:lnSpc>
+                <a:spcPct val="118000"/>
+              </a:lnSpc>
+            </a:pPr>
+            <a:r>
+              <a:rPr sz="4500" b="0" u="none" i="0">
+                <a:solidFill>
+                  <a:srgbClr val="18181B"/>
+                </a:solidFill>
+                <a:latin typeface="Arial"/>
+              </a:rPr>
+              <a:t>Common-start is correct—but recomputes longer prefix hits</a:t>
+            </a:r>
+          </a:p>
+        </p:txBody>
+      </p:sp>
+      <p:pic>
+        <p:nvPicPr>
+          <p:cNvPr id="4" name="figure" descr="last_week_ragged_execution.png"/>
+          <p:cNvPicPr>
+            <a:picLocks noChangeAspect="1"/>
+          </p:cNvPicPr>
+          <p:nvPr/>
+        </p:nvPicPr>
+        <p:blipFill>
+          <a:blip r:embed="rId2"/>
+          <a:stretch>
+            <a:fillRect/>
+          </a:stretch>
+        </p:blipFill>
+        <p:spPr>
+          <a:xfrm>
+            <a:off x="3458970" y="2484882"/>
+            <a:ext cx="11370059" cy="4944618"/>
+          </a:xfrm>
+          <a:prstGeom prst="rect">
+            <a:avLst/>
+          </a:prstGeom>
+        </p:spPr>
+      </p:pic>
+      <p:sp>
+        <p:nvSpPr>
+          <p:cNvPr id="5" name="TextBox 4"/>
+          <p:cNvSpPr txBox="1"/>
+          <p:nvPr/>
+        </p:nvSpPr>
+        <p:spPr>
+          <a:xfrm>
+            <a:off x="987552" y="7703820"/>
+            <a:ext cx="16312896" cy="653796"/>
+          </a:xfrm>
+          <a:prstGeom prst="rect">
+            <a:avLst/>
+          </a:prstGeom>
+          <a:noFill/>
+        </p:spPr>
+        <p:txBody>
+          <a:bodyPr wrap="square" lIns="0" rIns="0" tIns="0" bIns="0" anchor="t">
+            <a:spAutoFit/>
+          </a:bodyPr>
+          <a:lstStyle/>
+          <a:p>
+            <a:pPr algn="l">
+              <a:lnSpc>
+                <a:spcPct val="132000"/>
+              </a:lnSpc>
+            </a:pPr>
+            <a:r>
+              <a:rPr sz="1950" b="0" u="none" i="0">
+                <a:solidFill>
+                  <a:srgbClr val="A1A1AA"/>
+                </a:solidFill>
+                <a:latin typeface="Arial"/>
+              </a:rPr>
+              <a:t>Lane A can reuse 768 tokens while Lane B can reuse only 256. The current batch starts both at 256, so Lane A re-executes 512 already-known token positions.</a:t>
             </a:r>
           </a:p>
         </p:txBody>

--- a/projects/WaferEngine-staging/meetings/2026-08-24.pptx
+++ b/projects/WaferEngine-staging/meetings/2026-08-24.pptx
@@ -649,7 +649,7 @@
           <a:lstStyle/>
           <a:p>
             <a:r>
-              <a:t>v4 wins every measured R&gt;=2 cell, so this page intentionally removes v3/v5. Model form: C_v4 = C_floor + (E-4)N*C_owner + W_fwd*C_router, W_fwd=(N-N/R)E. C_floor prices launch/control and role setup. C_owner prices the ordinary endpoint path per payload word: 96.00 task / 65.08 owner-DSD. C_router is the incremental multi-row forwarding tax: 1.06 / 1.29 cycles per forwarded word. The topology crop is derived from docs/diagrams/m3-multirow-v4-vs-v5.excalidraw; it shows the sequential GO epoch and router transit row.</a:t>
+              <a:t>Replaces the earlier v4-equation slide per Le's request: full model view, modest typography. The v4-topology figure remains in figures/fig_v4_model_topology.png if wanted back. Deeper provenance: PREREGISTRATION-multirow.md consolidated record; perf_model.py --selftest.</a:t>
             </a:r>
           </a:p>
         </p:txBody>
@@ -695,7 +695,7 @@
           <a:lstStyle/>
           <a:p>
             <a:r>
-              <a:t>Two measured router-only terms: distance adds t_hop=2.0 cycles per transit hop per direction, so the full-cycle increment is 2(D-1)t_hop; v4 multi-row forwarding adds 1.06/1.29 cycles per forwarded word. CE coefficients are much larger: emit loop 13.0, reload relay about 28.8, park receive 43.3, receive+validate+forward 75.4 cycles/word. The comparison is mechanism-level: t_hop has units cycles/hop and is not plotted beside cycles/word. Pipeline stages combine by the binding maximum, not an unconditional sum. The demo blocks compute at the round boundary, so live concurrent-CE interference remains unmeasured.</a:t>
+              <a:t>The remaining CE items on the tier's critical path are storage park receive (43.3, task) and emit (13.0, sync loop) — the projected ~4-5x next rung (labeled projection). Transport-side open items are congestion-class, not latency-class: link sharing with live decode and multi-lane aggregation are unmeasured (all runs isolated single-lane). Wire floor 1 word/cyc/link is spec, not measured; everything else on the chart is a device fit.</a:t>
             </a:r>
           </a:p>
         </p:txBody>
@@ -6136,7 +6136,7 @@
                 </a:solidFill>
                 <a:latin typeface="Arial"/>
               </a:rPr>
-              <a:t>MODEL · V4 GO-CHAIN, MEASURED WINNER FOR R &gt;= 2</a:t>
+              <a:t>MODEL · EQUATIONS AND FITTED COEFFICIENTS</a:t>
             </a:r>
           </a:p>
         </p:txBody>
@@ -6175,14 +6175,14 @@
                 </a:solidFill>
                 <a:latin typeface="Arial"/>
               </a:rPr>
-              <a:t>v4 cost = endpoint baseline + router-only forwarding</a:t>
+              <a:t>Three device-fit models, one coefficient table</a:t>
             </a:r>
           </a:p>
         </p:txBody>
       </p:sp>
       <p:pic>
         <p:nvPicPr>
-          <p:cNvPr id="4" name="figure" descr="fig_v4_model_topology.png"/>
+          <p:cNvPr id="4" name="figure" descr="fig_model_panel.png"/>
           <p:cNvPicPr>
             <a:picLocks noChangeAspect="1"/>
           </p:cNvPicPr>
@@ -6196,8 +6196,8 @@
         </p:blipFill>
         <p:spPr>
           <a:xfrm>
-            <a:off x="2981063" y="2484882"/>
-            <a:ext cx="12325873" cy="4944618"/>
+            <a:off x="4481931" y="2484882"/>
+            <a:ext cx="9324136" cy="4944618"/>
           </a:xfrm>
           <a:prstGeom prst="rect">
             <a:avLst/>
@@ -6238,7 +6238,7 @@
                 </a:solidFill>
                 <a:latin typeface="Arial"/>
               </a:rPr>
-              <a:t>Generic equation first, fitted coefficients second, topology at right. Setting: N=256, E&gt;=64; pairs are task | owner-side bulk-DSD. v4 epoch_sum excludes small inter-epoch GO gaps.</a:t>
+              <a:t>Internal-discussion reference: the three fitted equations (task | dsd pairs) and every coefficient with its meaning and fit provenance. All values are real CS-3 measurements; selftest reproduces 39 device anchors under 1%.</a:t>
             </a:r>
           </a:p>
         </p:txBody>
@@ -6295,7 +6295,7 @@
                 </a:solidFill>
                 <a:latin typeface="Arial"/>
               </a:rPr>
-              <a:t>MECHANISM · ROUTER TRANSIT VS CE PROCESSING</a:t>
+              <a:t>INSIGHT · TRANSPORT VS CE, AND THE KNOB FOR EACH</a:t>
             </a:r>
           </a:p>
         </p:txBody>
@@ -6309,7 +6309,7 @@
         <p:spPr>
           <a:xfrm>
             <a:off x="987552" y="1371600"/>
-            <a:ext cx="16312896" cy="674369"/>
+            <a:ext cx="16312896" cy="1348739"/>
           </a:xfrm>
           <a:prstGeom prst="rect">
             <a:avLst/>
@@ -6334,7 +6334,7 @@
                 </a:solidFill>
                 <a:latin typeface="Arial"/>
               </a:rPr>
-              <a:t>The fabric is not binding: CE per-word handling dominates</a:t>
+              <a:t>Pure transport is 1-2 cyc/word; CE send/recv is 13-75 — and each class has its own lever</a:t>
             </a:r>
           </a:p>
         </p:txBody>
@@ -6355,8 +6355,8 @@
         </p:blipFill>
         <p:spPr>
           <a:xfrm>
-            <a:off x="3865667" y="2484882"/>
-            <a:ext cx="10556665" cy="4944618"/>
+            <a:off x="5527548" y="3159251"/>
+            <a:ext cx="7232903" cy="3616451"/>
           </a:xfrm>
           <a:prstGeom prst="rect">
             <a:avLst/>
@@ -6371,8 +6371,8 @@
         </p:nvSpPr>
         <p:spPr>
           <a:xfrm>
-            <a:off x="987552" y="7703820"/>
-            <a:ext cx="16312896" cy="653796"/>
+            <a:off x="987552" y="7050023"/>
+            <a:ext cx="16312896" cy="1307592"/>
           </a:xfrm>
           <a:prstGeom prst="rect">
             <a:avLst/>
@@ -6397,7 +6397,7 @@
                 </a:solidFill>
                 <a:latin typeface="Arial"/>
               </a:rPr>
-              <a:t>Router-only means switch-to-switch transit with no RAMP, IQ/task, CE landing, or local copy/re-emit. It still consumes links and can backpressure; current measurements are isolated, single-lane runs.</a:t>
+              <a:t>Left: every measured per-word cost, colored by class — transport (router/wire) vs CE send/recv. Right: what moves each class. Transport depends on storage-PE placement, measured latency-free (2.0 cyc/hop, no per-word term). CE depends on the thread model (task -&gt; DSD, measured on the owner side) and on how work is allocated across CEs: v5 concentrates all forwarding on row-0's CE (tax 30.7-47.0) while v4 leaves inter-row movement to routers (tax 1.06-1.29) — the 25-35x gap is the allocation decision itself, measured.</a:t>
             </a:r>
           </a:p>
         </p:txBody>
